--- a/downloads/design/kyle-hobson-design-deck.pptx
+++ b/downloads/design/kyle-hobson-design-deck.pptx
@@ -2,22 +2,22 @@
 <file path=ppt/presentation.xml><?xml version="1.0" encoding="utf-8"?>
 <p:presentation xmlns:p="http://schemas.openxmlformats.org/presentationml/2006/main">
   <p:sldMasterIdLst>
-    <p:sldMasterId xmlns:r="http://schemas.openxmlformats.org/officeDocument/2006/relationships" id="2147483648" r:id="R0c3f4fe63ea04586"/>
+    <p:sldMasterId xmlns:r="http://schemas.openxmlformats.org/officeDocument/2006/relationships" id="2147483648" r:id="Rd4a4a6cdc4434ee0"/>
   </p:sldMasterIdLst>
   <p:notesMasterIdLst>
-    <p:notesMasterId xmlns:r="http://schemas.openxmlformats.org/officeDocument/2006/relationships" r:id="Ra413cbe6afa84164"/>
+    <p:notesMasterId xmlns:r="http://schemas.openxmlformats.org/officeDocument/2006/relationships" r:id="R54e49a45bd1b4d88"/>
   </p:notesMasterIdLst>
   <p:sldIdLst>
-    <p:sldId xmlns:r="http://schemas.openxmlformats.org/officeDocument/2006/relationships" id="256" r:id="Rd6c09bcb34754d5a"/>
-    <p:sldId xmlns:r="http://schemas.openxmlformats.org/officeDocument/2006/relationships" id="257" r:id="R7376dffbc42047b7"/>
-    <p:sldId xmlns:r="http://schemas.openxmlformats.org/officeDocument/2006/relationships" id="258" r:id="Re5c93c849128460b"/>
-    <p:sldId xmlns:r="http://schemas.openxmlformats.org/officeDocument/2006/relationships" id="259" r:id="R6dd2c30e4b8a4ad4"/>
-    <p:sldId xmlns:r="http://schemas.openxmlformats.org/officeDocument/2006/relationships" id="260" r:id="R636df922dea649b2"/>
-    <p:sldId xmlns:r="http://schemas.openxmlformats.org/officeDocument/2006/relationships" id="261" r:id="R824c9507610647ac"/>
-    <p:sldId xmlns:r="http://schemas.openxmlformats.org/officeDocument/2006/relationships" id="262" r:id="R2797e41e298d4044"/>
-    <p:sldId xmlns:r="http://schemas.openxmlformats.org/officeDocument/2006/relationships" id="263" r:id="Rad8149b6b81f42d3"/>
-    <p:sldId xmlns:r="http://schemas.openxmlformats.org/officeDocument/2006/relationships" id="264" r:id="R608a9fe242424378"/>
-    <p:sldId xmlns:r="http://schemas.openxmlformats.org/officeDocument/2006/relationships" id="265" r:id="Re7d5f6f87d994bce"/>
+    <p:sldId xmlns:r="http://schemas.openxmlformats.org/officeDocument/2006/relationships" id="256" r:id="Rc55d2dae5da346f9"/>
+    <p:sldId xmlns:r="http://schemas.openxmlformats.org/officeDocument/2006/relationships" id="257" r:id="Rd0161f1a86324e7c"/>
+    <p:sldId xmlns:r="http://schemas.openxmlformats.org/officeDocument/2006/relationships" id="258" r:id="R2aa54f7e85b34425"/>
+    <p:sldId xmlns:r="http://schemas.openxmlformats.org/officeDocument/2006/relationships" id="259" r:id="Rf2d4a4384a434a77"/>
+    <p:sldId xmlns:r="http://schemas.openxmlformats.org/officeDocument/2006/relationships" id="260" r:id="Re0c53f9a07634495"/>
+    <p:sldId xmlns:r="http://schemas.openxmlformats.org/officeDocument/2006/relationships" id="261" r:id="R55fb3cac46794274"/>
+    <p:sldId xmlns:r="http://schemas.openxmlformats.org/officeDocument/2006/relationships" id="262" r:id="Rd98fe14cea53497c"/>
+    <p:sldId xmlns:r="http://schemas.openxmlformats.org/officeDocument/2006/relationships" id="263" r:id="R74a50880471b4848"/>
+    <p:sldId xmlns:r="http://schemas.openxmlformats.org/officeDocument/2006/relationships" id="264" r:id="R8d4fe22f85d24523"/>
+    <p:sldId xmlns:r="http://schemas.openxmlformats.org/officeDocument/2006/relationships" id="265" r:id="R9b70fcae2197455a"/>
   </p:sldIdLst>
   <p:sldSz cx="12192000" cy="6858000"/>
   <p:notesSz cx="6858000" cy="9144000"/>
@@ -1149,7 +1149,7 @@
   </p:cSld>
   <p:clrMap bg1="lt1" tx1="dk1" bg2="lt2" tx2="dk2" accent1="accent1" accent2="accent2" accent3="accent3" accent4="accent4" accent5="accent5" accent6="accent6" hlink="hlink" folHlink="folHlink"/>
   <p:sldLayoutIdLst>
-    <p:sldLayoutId xmlns:r="http://schemas.openxmlformats.org/officeDocument/2006/relationships" id="2147483649" r:id="Rd8835c28c8794da0"/>
+    <p:sldLayoutId xmlns:r="http://schemas.openxmlformats.org/officeDocument/2006/relationships" id="2147483649" r:id="R8a3a50e2e54143ec"/>
   </p:sldLayoutIdLst>
   <p:txStyles>
     <p:titleStyle>
@@ -1700,7 +1700,7 @@
           <p:cNvPr id="8" name="slide-number">
             <a:extLst xmlns:a="http://schemas.openxmlformats.org/drawingml/2006/main">
               <a:ext uri="{FF2B5EF4-FFF2-40B4-BE49-F238E27FC236}">
-                <a16:creationId xmlns:a16="http://schemas.microsoft.com/office/drawing/2014/main" id="{40907753-EE67-4220-963F-6331F9406058}"/>
+                <a16:creationId xmlns:a16="http://schemas.microsoft.com/office/drawing/2014/main" id="{492DE73A-0931-4DF0-B638-E78D03857ABB}"/>
               </a:ext>
             </a:extLst>
           </p:cNvPr>
@@ -1761,7 +1761,7 @@
           <p:cNvPr id="2" name="section-label">
             <a:extLst xmlns:a="http://schemas.openxmlformats.org/drawingml/2006/main">
               <a:ext uri="{FF2B5EF4-FFF2-40B4-BE49-F238E27FC236}">
-                <a16:creationId xmlns:a16="http://schemas.microsoft.com/office/drawing/2014/main" id="{8B13A844-07D2-4962-A3F3-6F2607108F34}"/>
+                <a16:creationId xmlns:a16="http://schemas.microsoft.com/office/drawing/2014/main" id="{3C89E49E-2098-454A-9B0C-5DDBBD3A514A}"/>
               </a:ext>
             </a:extLst>
           </p:cNvPr>
@@ -1822,7 +1822,7 @@
           <p:cNvPr id="3" name="headline">
             <a:extLst xmlns:a="http://schemas.openxmlformats.org/drawingml/2006/main">
               <a:ext uri="{FF2B5EF4-FFF2-40B4-BE49-F238E27FC236}">
-                <a16:creationId xmlns:a16="http://schemas.microsoft.com/office/drawing/2014/main" id="{A6DA54E9-8A29-4110-B824-B902786AC8CD}"/>
+                <a16:creationId xmlns:a16="http://schemas.microsoft.com/office/drawing/2014/main" id="{A1051729-87CD-4B5D-915A-189732A894EA}"/>
               </a:ext>
             </a:extLst>
           </p:cNvPr>
@@ -1910,7 +1910,7 @@
           <p:cNvPr id="4" name="cover-intro">
             <a:extLst xmlns:a="http://schemas.openxmlformats.org/drawingml/2006/main">
               <a:ext uri="{FF2B5EF4-FFF2-40B4-BE49-F238E27FC236}">
-                <a16:creationId xmlns:a16="http://schemas.microsoft.com/office/drawing/2014/main" id="{65D56102-0C04-4968-A36E-2D38F2E0A95C}"/>
+                <a16:creationId xmlns:a16="http://schemas.microsoft.com/office/drawing/2014/main" id="{C38A2793-DDE7-40B3-8B7D-8DA4C98027C0}"/>
               </a:ext>
             </a:extLst>
           </p:cNvPr>
@@ -1998,7 +1998,7 @@
           <p:cNvPr id="5" name="cover-accent">
             <a:extLst xmlns:a="http://schemas.openxmlformats.org/drawingml/2006/main">
               <a:ext uri="{FF2B5EF4-FFF2-40B4-BE49-F238E27FC236}">
-                <a16:creationId xmlns:a16="http://schemas.microsoft.com/office/drawing/2014/main" id="{228DA647-0932-4AC7-A2D7-C1864DCAAF8D}"/>
+                <a16:creationId xmlns:a16="http://schemas.microsoft.com/office/drawing/2014/main" id="{38682704-A57D-4AF6-BF13-D9031F1ACD20}"/>
               </a:ext>
             </a:extLst>
           </p:cNvPr>
@@ -2028,7 +2028,7 @@
           <p:cNvPr id="6" name="cover-type">
             <a:extLst xmlns:a="http://schemas.openxmlformats.org/drawingml/2006/main">
               <a:ext uri="{FF2B5EF4-FFF2-40B4-BE49-F238E27FC236}">
-                <a16:creationId xmlns:a16="http://schemas.microsoft.com/office/drawing/2014/main" id="{14C78FF0-7BEE-40C7-99B5-F1883DB2E32E}"/>
+                <a16:creationId xmlns:a16="http://schemas.microsoft.com/office/drawing/2014/main" id="{B7C11EB2-DFE4-4C9E-8DB5-EA1671C71F91}"/>
               </a:ext>
             </a:extLst>
           </p:cNvPr>
@@ -2093,7 +2093,7 @@
           <p:nvPr/>
         </p:nvPicPr>
         <p:blipFill>
-          <a:blip xmlns:r="http://schemas.openxmlformats.org/officeDocument/2006/relationships" xmlns:a="http://schemas.openxmlformats.org/drawingml/2006/main" r:embed="R7682588021274aa6"/>
+          <a:blip xmlns:r="http://schemas.openxmlformats.org/officeDocument/2006/relationships" xmlns:a="http://schemas.openxmlformats.org/drawingml/2006/main" r:embed="R46d41c84d1d64525"/>
           <a:stretch xmlns:a="http://schemas.openxmlformats.org/drawingml/2006/main"/>
         </p:blipFill>
         <p:spPr>
@@ -2109,7 +2109,7 @@
     </p:spTree>
     <p:extLst>
       <p:ext uri="{BB962C8B-B14F-4D97-AF65-F5344CB8AC3E}">
-        <p14:creationId xmlns:p14="http://schemas.microsoft.com/office/powerpoint/2010/main" val="1195653687"/>
+        <p14:creationId xmlns:p14="http://schemas.microsoft.com/office/powerpoint/2010/main" val="127214222"/>
       </p:ext>
     </p:extLst>
   </p:cSld>
@@ -2140,7 +2140,7 @@
           <p:cNvPr id="7" name="slide-number">
             <a:extLst xmlns:a="http://schemas.openxmlformats.org/drawingml/2006/main">
               <a:ext uri="{FF2B5EF4-FFF2-40B4-BE49-F238E27FC236}">
-                <a16:creationId xmlns:a16="http://schemas.microsoft.com/office/drawing/2014/main" id="{FF221CA9-255C-404B-AE73-ED3F171E1A8D}"/>
+                <a16:creationId xmlns:a16="http://schemas.microsoft.com/office/drawing/2014/main" id="{33DA02CC-7D93-4C40-8E3C-33CD347FD86B}"/>
               </a:ext>
             </a:extLst>
           </p:cNvPr>
@@ -2201,7 +2201,7 @@
           <p:cNvPr id="2" name="section-label">
             <a:extLst xmlns:a="http://schemas.openxmlformats.org/drawingml/2006/main">
               <a:ext uri="{FF2B5EF4-FFF2-40B4-BE49-F238E27FC236}">
-                <a16:creationId xmlns:a16="http://schemas.microsoft.com/office/drawing/2014/main" id="{F655188D-D30F-432E-837E-E3DD2DA20DE0}"/>
+                <a16:creationId xmlns:a16="http://schemas.microsoft.com/office/drawing/2014/main" id="{2B60DB53-B8D4-4417-B748-57850CB6C055}"/>
               </a:ext>
             </a:extLst>
           </p:cNvPr>
@@ -2262,7 +2262,7 @@
           <p:cNvPr id="3" name="headline">
             <a:extLst xmlns:a="http://schemas.openxmlformats.org/drawingml/2006/main">
               <a:ext uri="{FF2B5EF4-FFF2-40B4-BE49-F238E27FC236}">
-                <a16:creationId xmlns:a16="http://schemas.microsoft.com/office/drawing/2014/main" id="{546DCCD8-14AF-4357-B3F9-0C980992345B}"/>
+                <a16:creationId xmlns:a16="http://schemas.microsoft.com/office/drawing/2014/main" id="{21C6EA93-3006-41D2-B301-6986DEBA6298}"/>
               </a:ext>
             </a:extLst>
           </p:cNvPr>
@@ -2350,7 +2350,7 @@
           <p:cNvPr id="4" name="contact-intent">
             <a:extLst xmlns:a="http://schemas.openxmlformats.org/drawingml/2006/main">
               <a:ext uri="{FF2B5EF4-FFF2-40B4-BE49-F238E27FC236}">
-                <a16:creationId xmlns:a16="http://schemas.microsoft.com/office/drawing/2014/main" id="{F5735855-6BD3-4D17-B5CB-E9020F44EDCD}"/>
+                <a16:creationId xmlns:a16="http://schemas.microsoft.com/office/drawing/2014/main" id="{A7B82F83-C224-4802-814B-1CF06E64E1DF}"/>
               </a:ext>
             </a:extLst>
           </p:cNvPr>
@@ -2411,7 +2411,7 @@
           <p:cNvPr id="5" name="email">
             <a:extLst xmlns:a="http://schemas.openxmlformats.org/drawingml/2006/main">
               <a:ext uri="{FF2B5EF4-FFF2-40B4-BE49-F238E27FC236}">
-                <a16:creationId xmlns:a16="http://schemas.microsoft.com/office/drawing/2014/main" id="{22B337B1-2931-44CF-951B-8CA67E373738}"/>
+                <a16:creationId xmlns:a16="http://schemas.microsoft.com/office/drawing/2014/main" id="{3F2E2C04-D732-46C4-AB44-C693BCD7222B}"/>
               </a:ext>
             </a:extLst>
           </p:cNvPr>
@@ -2461,7 +2461,7 @@
                 <a:latin typeface="Helvetica Neue"/>
                 <a:ea typeface="Helvetica Neue"/>
                 <a:cs typeface="Helvetica Neue"/>
-                <a:hlinkClick xmlns:r="http://schemas.openxmlformats.org/officeDocument/2006/relationships" r:id="R18253624faa6421a"/>
+                <a:hlinkClick xmlns:r="http://schemas.openxmlformats.org/officeDocument/2006/relationships" r:id="Rbec667ab4ce3484e"/>
               </a:rPr>
               <a:t>JonathanKyleHobson@gmail.com</a:t>
             </a:r>
@@ -2473,7 +2473,7 @@
           <p:cNvPr id="6" name="public-profile">
             <a:extLst xmlns:a="http://schemas.openxmlformats.org/drawingml/2006/main">
               <a:ext uri="{FF2B5EF4-FFF2-40B4-BE49-F238E27FC236}">
-                <a16:creationId xmlns:a16="http://schemas.microsoft.com/office/drawing/2014/main" id="{8D24133D-C292-459C-B2D7-FBF505751638}"/>
+                <a16:creationId xmlns:a16="http://schemas.microsoft.com/office/drawing/2014/main" id="{E49186DC-4498-4C42-A16C-B5F9BF4691BA}"/>
               </a:ext>
             </a:extLst>
           </p:cNvPr>
@@ -2523,7 +2523,7 @@
                 <a:latin typeface="Helvetica Neue"/>
                 <a:ea typeface="Helvetica Neue"/>
                 <a:cs typeface="Helvetica Neue"/>
-                <a:hlinkClick xmlns:r="http://schemas.openxmlformats.org/officeDocument/2006/relationships" r:id="R86d7044058e54587"/>
+                <a:hlinkClick xmlns:r="http://schemas.openxmlformats.org/officeDocument/2006/relationships" r:id="Rc99a5a53ca064438"/>
               </a:rPr>
               <a:t>jonathankhobson.github.io/portfolio/design</a:t>
             </a:r>
@@ -2533,7 +2533,7 @@
     </p:spTree>
     <p:extLst>
       <p:ext uri="{BB962C8B-B14F-4D97-AF65-F5344CB8AC3E}">
-        <p14:creationId xmlns:p14="http://schemas.microsoft.com/office/powerpoint/2010/main" val="1057773241"/>
+        <p14:creationId xmlns:p14="http://schemas.microsoft.com/office/powerpoint/2010/main" val="812961590"/>
       </p:ext>
     </p:extLst>
   </p:cSld>
@@ -2564,7 +2564,7 @@
           <p:cNvPr id="10" name="slide-number">
             <a:extLst xmlns:a="http://schemas.openxmlformats.org/drawingml/2006/main">
               <a:ext uri="{FF2B5EF4-FFF2-40B4-BE49-F238E27FC236}">
-                <a16:creationId xmlns:a16="http://schemas.microsoft.com/office/drawing/2014/main" id="{37BB7302-95D7-46E0-A8EC-535A66D9B489}"/>
+                <a16:creationId xmlns:a16="http://schemas.microsoft.com/office/drawing/2014/main" id="{745AA609-2CA9-4007-9B7A-CBFC4D69F578}"/>
               </a:ext>
             </a:extLst>
           </p:cNvPr>
@@ -2625,7 +2625,7 @@
           <p:cNvPr id="2" name="section-label">
             <a:extLst xmlns:a="http://schemas.openxmlformats.org/drawingml/2006/main">
               <a:ext uri="{FF2B5EF4-FFF2-40B4-BE49-F238E27FC236}">
-                <a16:creationId xmlns:a16="http://schemas.microsoft.com/office/drawing/2014/main" id="{0FF20F1E-2B9A-4542-AB75-33581569725B}"/>
+                <a16:creationId xmlns:a16="http://schemas.microsoft.com/office/drawing/2014/main" id="{700C287C-5FFC-40C5-ABDE-101BBF3FD22E}"/>
               </a:ext>
             </a:extLst>
           </p:cNvPr>
@@ -2686,7 +2686,7 @@
           <p:cNvPr id="3" name="headline">
             <a:extLst xmlns:a="http://schemas.openxmlformats.org/drawingml/2006/main">
               <a:ext uri="{FF2B5EF4-FFF2-40B4-BE49-F238E27FC236}">
-                <a16:creationId xmlns:a16="http://schemas.microsoft.com/office/drawing/2014/main" id="{B5AC6483-8772-451E-87B1-6C2686DCEA12}"/>
+                <a16:creationId xmlns:a16="http://schemas.microsoft.com/office/drawing/2014/main" id="{2E02C282-88BE-4257-BD76-875E363D018A}"/>
               </a:ext>
             </a:extLst>
           </p:cNvPr>
@@ -2774,7 +2774,7 @@
           <p:cNvPr id="4" name="role">
             <a:extLst xmlns:a="http://schemas.openxmlformats.org/drawingml/2006/main">
               <a:ext uri="{FF2B5EF4-FFF2-40B4-BE49-F238E27FC236}">
-                <a16:creationId xmlns:a16="http://schemas.microsoft.com/office/drawing/2014/main" id="{BF0E2209-87E1-4425-AD99-97BD78614053}"/>
+                <a16:creationId xmlns:a16="http://schemas.microsoft.com/office/drawing/2014/main" id="{D2476ED9-8D8D-45EA-98A0-C4CCE6EF4CD0}"/>
               </a:ext>
             </a:extLst>
           </p:cNvPr>
@@ -2862,7 +2862,7 @@
           <p:cNvPr id="5" name="entry-decision">
             <a:extLst xmlns:a="http://schemas.openxmlformats.org/drawingml/2006/main">
               <a:ext uri="{FF2B5EF4-FFF2-40B4-BE49-F238E27FC236}">
-                <a16:creationId xmlns:a16="http://schemas.microsoft.com/office/drawing/2014/main" id="{EADBE31C-C9BD-4ECD-8B4D-F91FE2388BE8}"/>
+                <a16:creationId xmlns:a16="http://schemas.microsoft.com/office/drawing/2014/main" id="{964767E5-4B96-412C-9AAE-3835443136A6}"/>
               </a:ext>
             </a:extLst>
           </p:cNvPr>
@@ -2923,7 +2923,7 @@
           <p:cNvPr id="6" name="stage">
             <a:extLst xmlns:a="http://schemas.openxmlformats.org/drawingml/2006/main">
               <a:ext uri="{FF2B5EF4-FFF2-40B4-BE49-F238E27FC236}">
-                <a16:creationId xmlns:a16="http://schemas.microsoft.com/office/drawing/2014/main" id="{59738784-C14D-4678-B609-2154AAB011A7}"/>
+                <a16:creationId xmlns:a16="http://schemas.microsoft.com/office/drawing/2014/main" id="{CD598423-7149-4D3C-A1F2-F34ED4680DD9}"/>
               </a:ext>
             </a:extLst>
           </p:cNvPr>
@@ -2984,7 +2984,7 @@
           <p:cNvPr id="7" name="entry-scope">
             <a:extLst xmlns:a="http://schemas.openxmlformats.org/drawingml/2006/main">
               <a:ext uri="{FF2B5EF4-FFF2-40B4-BE49-F238E27FC236}">
-                <a16:creationId xmlns:a16="http://schemas.microsoft.com/office/drawing/2014/main" id="{92EA0FD6-9BE4-4F82-913A-7E8BCF2D30AD}"/>
+                <a16:creationId xmlns:a16="http://schemas.microsoft.com/office/drawing/2014/main" id="{FFBD44B0-BA71-490E-90E1-D6C939D37258}"/>
               </a:ext>
             </a:extLst>
           </p:cNvPr>
@@ -3045,7 +3045,7 @@
           <p:cNvPr id="8" name="phone-surface">
             <a:extLst xmlns:a="http://schemas.openxmlformats.org/drawingml/2006/main">
               <a:ext uri="{FF2B5EF4-FFF2-40B4-BE49-F238E27FC236}">
-                <a16:creationId xmlns:a16="http://schemas.microsoft.com/office/drawing/2014/main" id="{773FFF75-5C0F-4BE5-8D41-FC35BC698125}"/>
+                <a16:creationId xmlns:a16="http://schemas.microsoft.com/office/drawing/2014/main" id="{89C8B721-FE91-49CF-BC3D-D3E65F0897F9}"/>
               </a:ext>
             </a:extLst>
           </p:cNvPr>
@@ -3079,7 +3079,7 @@
           <p:nvPr/>
         </p:nvPicPr>
         <p:blipFill>
-          <a:blip xmlns:r="http://schemas.openxmlformats.org/officeDocument/2006/relationships" xmlns:a="http://schemas.openxmlformats.org/drawingml/2006/main" r:embed="R3a2f1444a43443fc"/>
+          <a:blip xmlns:r="http://schemas.openxmlformats.org/officeDocument/2006/relationships" xmlns:a="http://schemas.openxmlformats.org/drawingml/2006/main" r:embed="R08722bb7f8ed4c41"/>
           <a:stretch xmlns:a="http://schemas.openxmlformats.org/drawingml/2006/main"/>
         </p:blipFill>
         <p:spPr>
@@ -3095,7 +3095,7 @@
     </p:spTree>
     <p:extLst>
       <p:ext uri="{BB962C8B-B14F-4D97-AF65-F5344CB8AC3E}">
-        <p14:creationId xmlns:p14="http://schemas.microsoft.com/office/powerpoint/2010/main" val="1857698077"/>
+        <p14:creationId xmlns:p14="http://schemas.microsoft.com/office/powerpoint/2010/main" val="122957110"/>
       </p:ext>
     </p:extLst>
   </p:cSld>
@@ -3126,7 +3126,7 @@
           <p:cNvPr id="9" name="slide-number">
             <a:extLst xmlns:a="http://schemas.openxmlformats.org/drawingml/2006/main">
               <a:ext uri="{FF2B5EF4-FFF2-40B4-BE49-F238E27FC236}">
-                <a16:creationId xmlns:a16="http://schemas.microsoft.com/office/drawing/2014/main" id="{E3F7DCF9-5CA5-46F6-ADFA-ADE9C4771048}"/>
+                <a16:creationId xmlns:a16="http://schemas.microsoft.com/office/drawing/2014/main" id="{1236A8A2-5FD9-47BC-9E19-3905AE09D3A3}"/>
               </a:ext>
             </a:extLst>
           </p:cNvPr>
@@ -3187,7 +3187,7 @@
           <p:cNvPr id="2" name="section-label">
             <a:extLst xmlns:a="http://schemas.openxmlformats.org/drawingml/2006/main">
               <a:ext uri="{FF2B5EF4-FFF2-40B4-BE49-F238E27FC236}">
-                <a16:creationId xmlns:a16="http://schemas.microsoft.com/office/drawing/2014/main" id="{77EE1F14-B886-4EF5-B432-AD48112028D7}"/>
+                <a16:creationId xmlns:a16="http://schemas.microsoft.com/office/drawing/2014/main" id="{08D28B54-86F1-4FDD-9684-DCA0024BCAB1}"/>
               </a:ext>
             </a:extLst>
           </p:cNvPr>
@@ -3248,7 +3248,7 @@
           <p:cNvPr id="3" name="headline">
             <a:extLst xmlns:a="http://schemas.openxmlformats.org/drawingml/2006/main">
               <a:ext uri="{FF2B5EF4-FFF2-40B4-BE49-F238E27FC236}">
-                <a16:creationId xmlns:a16="http://schemas.microsoft.com/office/drawing/2014/main" id="{F1EB944A-56E7-4215-8A50-2D676630B766}"/>
+                <a16:creationId xmlns:a16="http://schemas.microsoft.com/office/drawing/2014/main" id="{7CF3A88A-C1A7-4AA4-AB38-E6DCA3AE351D}"/>
               </a:ext>
             </a:extLst>
           </p:cNvPr>
@@ -3336,7 +3336,7 @@
           <p:cNvPr id="4" name="waiting-decision">
             <a:extLst xmlns:a="http://schemas.openxmlformats.org/drawingml/2006/main">
               <a:ext uri="{FF2B5EF4-FFF2-40B4-BE49-F238E27FC236}">
-                <a16:creationId xmlns:a16="http://schemas.microsoft.com/office/drawing/2014/main" id="{153209C4-3AA7-4762-8D6B-5B14B2A33184}"/>
+                <a16:creationId xmlns:a16="http://schemas.microsoft.com/office/drawing/2014/main" id="{5C8DF091-82B2-41F3-8BDD-337715CA66BD}"/>
               </a:ext>
             </a:extLst>
           </p:cNvPr>
@@ -3397,7 +3397,7 @@
           <p:cNvPr id="5" name="waiting-constraint">
             <a:extLst xmlns:a="http://schemas.openxmlformats.org/drawingml/2006/main">
               <a:ext uri="{FF2B5EF4-FFF2-40B4-BE49-F238E27FC236}">
-                <a16:creationId xmlns:a16="http://schemas.microsoft.com/office/drawing/2014/main" id="{A22F90BF-8AED-442D-A0A1-14FE09FCF0F0}"/>
+                <a16:creationId xmlns:a16="http://schemas.microsoft.com/office/drawing/2014/main" id="{2726AC3B-9CCE-471F-B524-7EFCE813ED15}"/>
               </a:ext>
             </a:extLst>
           </p:cNvPr>
@@ -3462,7 +3462,7 @@
           <p:nvPr/>
         </p:nvPicPr>
         <p:blipFill>
-          <a:blip xmlns:r="http://schemas.openxmlformats.org/officeDocument/2006/relationships" xmlns:a="http://schemas.openxmlformats.org/drawingml/2006/main" r:embed="R637729a816694be8"/>
+          <a:blip xmlns:r="http://schemas.openxmlformats.org/officeDocument/2006/relationships" xmlns:a="http://schemas.openxmlformats.org/drawingml/2006/main" r:embed="Rfefdc1112d4e4521"/>
           <a:stretch xmlns:a="http://schemas.openxmlformats.org/drawingml/2006/main"/>
         </p:blipFill>
         <p:spPr>
@@ -3480,7 +3480,7 @@
           <p:cNvPr id="7" name="detail-caption">
             <a:extLst xmlns:a="http://schemas.openxmlformats.org/drawingml/2006/main">
               <a:ext uri="{FF2B5EF4-FFF2-40B4-BE49-F238E27FC236}">
-                <a16:creationId xmlns:a16="http://schemas.microsoft.com/office/drawing/2014/main" id="{A7B42DAB-792F-4814-8A19-265F1518D89C}"/>
+                <a16:creationId xmlns:a16="http://schemas.microsoft.com/office/drawing/2014/main" id="{1453D508-F74E-4661-9647-0043F53EE4E5}"/>
               </a:ext>
             </a:extLst>
           </p:cNvPr>
@@ -3545,7 +3545,7 @@
           <p:nvPr/>
         </p:nvPicPr>
         <p:blipFill>
-          <a:blip xmlns:r="http://schemas.openxmlformats.org/officeDocument/2006/relationships" xmlns:a="http://schemas.openxmlformats.org/drawingml/2006/main" r:embed="R33ef4f25a8664d53"/>
+          <a:blip xmlns:r="http://schemas.openxmlformats.org/officeDocument/2006/relationships" xmlns:a="http://schemas.openxmlformats.org/drawingml/2006/main" r:embed="R018ac03db71e42fb"/>
           <a:stretch xmlns:a="http://schemas.openxmlformats.org/drawingml/2006/main"/>
         </p:blipFill>
         <p:spPr>
@@ -3561,7 +3561,7 @@
     </p:spTree>
     <p:extLst>
       <p:ext uri="{BB962C8B-B14F-4D97-AF65-F5344CB8AC3E}">
-        <p14:creationId xmlns:p14="http://schemas.microsoft.com/office/powerpoint/2010/main" val="280712050"/>
+        <p14:creationId xmlns:p14="http://schemas.microsoft.com/office/powerpoint/2010/main" val="1424311719"/>
       </p:ext>
     </p:extLst>
   </p:cSld>
@@ -3592,7 +3592,7 @@
           <p:cNvPr id="10" name="slide-number">
             <a:extLst xmlns:a="http://schemas.openxmlformats.org/drawingml/2006/main">
               <a:ext uri="{FF2B5EF4-FFF2-40B4-BE49-F238E27FC236}">
-                <a16:creationId xmlns:a16="http://schemas.microsoft.com/office/drawing/2014/main" id="{60ABFD67-EFA2-47C0-B8D2-F4B17F353770}"/>
+                <a16:creationId xmlns:a16="http://schemas.microsoft.com/office/drawing/2014/main" id="{9ED8A18E-B1B5-4A51-B27B-76E585B5C355}"/>
               </a:ext>
             </a:extLst>
           </p:cNvPr>
@@ -3653,7 +3653,7 @@
           <p:cNvPr id="2" name="section-label">
             <a:extLst xmlns:a="http://schemas.openxmlformats.org/drawingml/2006/main">
               <a:ext uri="{FF2B5EF4-FFF2-40B4-BE49-F238E27FC236}">
-                <a16:creationId xmlns:a16="http://schemas.microsoft.com/office/drawing/2014/main" id="{1B28E4CC-57C2-42A8-AC94-816EF09725AC}"/>
+                <a16:creationId xmlns:a16="http://schemas.microsoft.com/office/drawing/2014/main" id="{CAF097C2-CF62-4FDF-A614-4A9D539A1004}"/>
               </a:ext>
             </a:extLst>
           </p:cNvPr>
@@ -3714,7 +3714,7 @@
           <p:cNvPr id="3" name="headline">
             <a:extLst xmlns:a="http://schemas.openxmlformats.org/drawingml/2006/main">
               <a:ext uri="{FF2B5EF4-FFF2-40B4-BE49-F238E27FC236}">
-                <a16:creationId xmlns:a16="http://schemas.microsoft.com/office/drawing/2014/main" id="{1A230DE5-7E5C-4987-8659-C3870D8A35A9}"/>
+                <a16:creationId xmlns:a16="http://schemas.microsoft.com/office/drawing/2014/main" id="{2C5752DD-3752-4106-B06E-0605583D20CB}"/>
               </a:ext>
             </a:extLst>
           </p:cNvPr>
@@ -3802,7 +3802,7 @@
           <p:cNvPr id="4" name="recovery-decision">
             <a:extLst xmlns:a="http://schemas.openxmlformats.org/drawingml/2006/main">
               <a:ext uri="{FF2B5EF4-FFF2-40B4-BE49-F238E27FC236}">
-                <a16:creationId xmlns:a16="http://schemas.microsoft.com/office/drawing/2014/main" id="{0F7D635C-7136-442F-AD49-3214F78E71BB}"/>
+                <a16:creationId xmlns:a16="http://schemas.microsoft.com/office/drawing/2014/main" id="{F833A5E3-747E-4211-ABEA-A70EABC3F248}"/>
               </a:ext>
             </a:extLst>
           </p:cNvPr>
@@ -3863,7 +3863,7 @@
           <p:cNvPr id="5" name="recovery-outcome">
             <a:extLst xmlns:a="http://schemas.openxmlformats.org/drawingml/2006/main">
               <a:ext uri="{FF2B5EF4-FFF2-40B4-BE49-F238E27FC236}">
-                <a16:creationId xmlns:a16="http://schemas.microsoft.com/office/drawing/2014/main" id="{1AA72024-190B-4C62-9E45-892CC7D169D5}"/>
+                <a16:creationId xmlns:a16="http://schemas.microsoft.com/office/drawing/2014/main" id="{9BF1DBAE-5109-4B35-9E97-DDAE66987BEB}"/>
               </a:ext>
             </a:extLst>
           </p:cNvPr>
@@ -3924,7 +3924,7 @@
           <p:cNvPr id="6" name="incomplete-label">
             <a:extLst xmlns:a="http://schemas.openxmlformats.org/drawingml/2006/main">
               <a:ext uri="{FF2B5EF4-FFF2-40B4-BE49-F238E27FC236}">
-                <a16:creationId xmlns:a16="http://schemas.microsoft.com/office/drawing/2014/main" id="{03D0F967-2B39-4483-8E36-6C91E7185F78}"/>
+                <a16:creationId xmlns:a16="http://schemas.microsoft.com/office/drawing/2014/main" id="{7AB5C320-C73C-44F1-91AE-0A85EDF68552}"/>
               </a:ext>
             </a:extLst>
           </p:cNvPr>
@@ -3985,7 +3985,7 @@
           <p:cNvPr id="7" name="offline-label">
             <a:extLst xmlns:a="http://schemas.openxmlformats.org/drawingml/2006/main">
               <a:ext uri="{FF2B5EF4-FFF2-40B4-BE49-F238E27FC236}">
-                <a16:creationId xmlns:a16="http://schemas.microsoft.com/office/drawing/2014/main" id="{A9085755-E434-401E-877B-E300A9A7BD49}"/>
+                <a16:creationId xmlns:a16="http://schemas.microsoft.com/office/drawing/2014/main" id="{115336CE-F44F-45E6-8FF8-9E09E6C9A103}"/>
               </a:ext>
             </a:extLst>
           </p:cNvPr>
@@ -4050,7 +4050,7 @@
           <p:nvPr/>
         </p:nvPicPr>
         <p:blipFill>
-          <a:blip xmlns:r="http://schemas.openxmlformats.org/officeDocument/2006/relationships" xmlns:a="http://schemas.openxmlformats.org/drawingml/2006/main" r:embed="R63076d0d1fca4e59"/>
+          <a:blip xmlns:r="http://schemas.openxmlformats.org/officeDocument/2006/relationships" xmlns:a="http://schemas.openxmlformats.org/drawingml/2006/main" r:embed="R495b209980f54a99"/>
           <a:stretch xmlns:a="http://schemas.openxmlformats.org/drawingml/2006/main"/>
         </p:blipFill>
         <p:spPr>
@@ -4072,7 +4072,7 @@
           <p:nvPr/>
         </p:nvPicPr>
         <p:blipFill>
-          <a:blip xmlns:r="http://schemas.openxmlformats.org/officeDocument/2006/relationships" xmlns:a="http://schemas.openxmlformats.org/drawingml/2006/main" r:embed="R4e19fe8ee8c041af"/>
+          <a:blip xmlns:r="http://schemas.openxmlformats.org/officeDocument/2006/relationships" xmlns:a="http://schemas.openxmlformats.org/drawingml/2006/main" r:embed="R552dfe2e8cc64c0a"/>
           <a:stretch xmlns:a="http://schemas.openxmlformats.org/drawingml/2006/main"/>
         </p:blipFill>
         <p:spPr>
@@ -4088,7 +4088,7 @@
     </p:spTree>
     <p:extLst>
       <p:ext uri="{BB962C8B-B14F-4D97-AF65-F5344CB8AC3E}">
-        <p14:creationId xmlns:p14="http://schemas.microsoft.com/office/powerpoint/2010/main" val="654182577"/>
+        <p14:creationId xmlns:p14="http://schemas.microsoft.com/office/powerpoint/2010/main" val="268008632"/>
       </p:ext>
     </p:extLst>
   </p:cSld>
@@ -4119,7 +4119,7 @@
           <p:cNvPr id="8" name="slide-number">
             <a:extLst xmlns:a="http://schemas.openxmlformats.org/drawingml/2006/main">
               <a:ext uri="{FF2B5EF4-FFF2-40B4-BE49-F238E27FC236}">
-                <a16:creationId xmlns:a16="http://schemas.microsoft.com/office/drawing/2014/main" id="{AAF6936F-FC61-49AB-AB71-9A4706B6F68A}"/>
+                <a16:creationId xmlns:a16="http://schemas.microsoft.com/office/drawing/2014/main" id="{5E2CF711-39FB-4113-B23E-600DD14A1757}"/>
               </a:ext>
             </a:extLst>
           </p:cNvPr>
@@ -4180,7 +4180,7 @@
           <p:cNvPr id="2" name="section-label">
             <a:extLst xmlns:a="http://schemas.openxmlformats.org/drawingml/2006/main">
               <a:ext uri="{FF2B5EF4-FFF2-40B4-BE49-F238E27FC236}">
-                <a16:creationId xmlns:a16="http://schemas.microsoft.com/office/drawing/2014/main" id="{4A3E3811-0DED-4F79-AFF4-BECCF185F4FB}"/>
+                <a16:creationId xmlns:a16="http://schemas.microsoft.com/office/drawing/2014/main" id="{AE382314-AA87-4CA7-BC61-9AA94051CF69}"/>
               </a:ext>
             </a:extLst>
           </p:cNvPr>
@@ -4241,7 +4241,7 @@
           <p:cNvPr id="3" name="headline">
             <a:extLst xmlns:a="http://schemas.openxmlformats.org/drawingml/2006/main">
               <a:ext uri="{FF2B5EF4-FFF2-40B4-BE49-F238E27FC236}">
-                <a16:creationId xmlns:a16="http://schemas.microsoft.com/office/drawing/2014/main" id="{20EED95A-E8EE-46AB-BE74-FD6F8F2927EF}"/>
+                <a16:creationId xmlns:a16="http://schemas.microsoft.com/office/drawing/2014/main" id="{1A90B1DA-0D8D-4125-A4B6-B46E64269CCA}"/>
               </a:ext>
             </a:extLst>
           </p:cNvPr>
@@ -4329,7 +4329,7 @@
           <p:cNvPr id="4" name="role">
             <a:extLst xmlns:a="http://schemas.openxmlformats.org/drawingml/2006/main">
               <a:ext uri="{FF2B5EF4-FFF2-40B4-BE49-F238E27FC236}">
-                <a16:creationId xmlns:a16="http://schemas.microsoft.com/office/drawing/2014/main" id="{5F042EDF-2B1A-403E-B7DB-F853951CCA48}"/>
+                <a16:creationId xmlns:a16="http://schemas.microsoft.com/office/drawing/2014/main" id="{6B5DBAB9-BB69-429F-B468-25FB499F1EEB}"/>
               </a:ext>
             </a:extLst>
           </p:cNvPr>
@@ -4390,7 +4390,7 @@
           <p:cNvPr id="5" name="about-decision">
             <a:extLst xmlns:a="http://schemas.openxmlformats.org/drawingml/2006/main">
               <a:ext uri="{FF2B5EF4-FFF2-40B4-BE49-F238E27FC236}">
-                <a16:creationId xmlns:a16="http://schemas.microsoft.com/office/drawing/2014/main" id="{77417724-DF51-472E-848F-26164A7BFAF8}"/>
+                <a16:creationId xmlns:a16="http://schemas.microsoft.com/office/drawing/2014/main" id="{717E70D8-DF9F-4C5D-8260-E18083CAD533}"/>
               </a:ext>
             </a:extLst>
           </p:cNvPr>
@@ -4451,7 +4451,7 @@
           <p:cNvPr id="6" name="about-stage">
             <a:extLst xmlns:a="http://schemas.openxmlformats.org/drawingml/2006/main">
               <a:ext uri="{FF2B5EF4-FFF2-40B4-BE49-F238E27FC236}">
-                <a16:creationId xmlns:a16="http://schemas.microsoft.com/office/drawing/2014/main" id="{25C92173-7DE2-4D3F-97BD-D7702D26AAC8}"/>
+                <a16:creationId xmlns:a16="http://schemas.microsoft.com/office/drawing/2014/main" id="{E14CCC3B-E662-455B-B009-A8A58FBBE808}"/>
               </a:ext>
             </a:extLst>
           </p:cNvPr>
@@ -4543,7 +4543,7 @@
           <p:nvPr/>
         </p:nvPicPr>
         <p:blipFill>
-          <a:blip xmlns:r="http://schemas.openxmlformats.org/officeDocument/2006/relationships" xmlns:a="http://schemas.openxmlformats.org/drawingml/2006/main" r:embed="Radf5737f69a34b55"/>
+          <a:blip xmlns:r="http://schemas.openxmlformats.org/officeDocument/2006/relationships" xmlns:a="http://schemas.openxmlformats.org/drawingml/2006/main" r:embed="Rf395df382a34441f"/>
           <a:stretch xmlns:a="http://schemas.openxmlformats.org/drawingml/2006/main"/>
         </p:blipFill>
         <p:spPr>
@@ -4559,7 +4559,7 @@
     </p:spTree>
     <p:extLst>
       <p:ext uri="{BB962C8B-B14F-4D97-AF65-F5344CB8AC3E}">
-        <p14:creationId xmlns:p14="http://schemas.microsoft.com/office/powerpoint/2010/main" val="1996735105"/>
+        <p14:creationId xmlns:p14="http://schemas.microsoft.com/office/powerpoint/2010/main" val="915000282"/>
       </p:ext>
     </p:extLst>
   </p:cSld>
@@ -4590,7 +4590,7 @@
           <p:cNvPr id="8" name="slide-number">
             <a:extLst xmlns:a="http://schemas.openxmlformats.org/drawingml/2006/main">
               <a:ext uri="{FF2B5EF4-FFF2-40B4-BE49-F238E27FC236}">
-                <a16:creationId xmlns:a16="http://schemas.microsoft.com/office/drawing/2014/main" id="{D98E39B8-FEF3-429B-AAD6-8CD15D24089D}"/>
+                <a16:creationId xmlns:a16="http://schemas.microsoft.com/office/drawing/2014/main" id="{7A29E209-0B2F-4516-8DFF-425850D5B698}"/>
               </a:ext>
             </a:extLst>
           </p:cNvPr>
@@ -4651,7 +4651,7 @@
           <p:cNvPr id="2" name="section-label">
             <a:extLst xmlns:a="http://schemas.openxmlformats.org/drawingml/2006/main">
               <a:ext uri="{FF2B5EF4-FFF2-40B4-BE49-F238E27FC236}">
-                <a16:creationId xmlns:a16="http://schemas.microsoft.com/office/drawing/2014/main" id="{F328C108-8F07-4EE3-BEE2-12AF66595362}"/>
+                <a16:creationId xmlns:a16="http://schemas.microsoft.com/office/drawing/2014/main" id="{1BF4D6CE-E963-44C7-8754-817E72D94020}"/>
               </a:ext>
             </a:extLst>
           </p:cNvPr>
@@ -4712,7 +4712,7 @@
           <p:cNvPr id="3" name="headline">
             <a:extLst xmlns:a="http://schemas.openxmlformats.org/drawingml/2006/main">
               <a:ext uri="{FF2B5EF4-FFF2-40B4-BE49-F238E27FC236}">
-                <a16:creationId xmlns:a16="http://schemas.microsoft.com/office/drawing/2014/main" id="{837D0F28-18CD-42F0-8588-B8C010858959}"/>
+                <a16:creationId xmlns:a16="http://schemas.microsoft.com/office/drawing/2014/main" id="{13A368E2-36CB-4AE3-9801-21443B6548E9}"/>
               </a:ext>
             </a:extLst>
           </p:cNvPr>
@@ -4800,7 +4800,7 @@
           <p:cNvPr id="4" name="comparison-decision">
             <a:extLst xmlns:a="http://schemas.openxmlformats.org/drawingml/2006/main">
               <a:ext uri="{FF2B5EF4-FFF2-40B4-BE49-F238E27FC236}">
-                <a16:creationId xmlns:a16="http://schemas.microsoft.com/office/drawing/2014/main" id="{3CEB5E31-FE03-4359-934F-110B747CB88A}"/>
+                <a16:creationId xmlns:a16="http://schemas.microsoft.com/office/drawing/2014/main" id="{36D8B78A-121D-423C-BDFE-BFB9206B5683}"/>
               </a:ext>
             </a:extLst>
           </p:cNvPr>
@@ -4861,7 +4861,7 @@
           <p:cNvPr id="5" name="comparison-outcome">
             <a:extLst xmlns:a="http://schemas.openxmlformats.org/drawingml/2006/main">
               <a:ext uri="{FF2B5EF4-FFF2-40B4-BE49-F238E27FC236}">
-                <a16:creationId xmlns:a16="http://schemas.microsoft.com/office/drawing/2014/main" id="{7DE7BB39-06CD-4338-ADAB-1F0FFF737BBA}"/>
+                <a16:creationId xmlns:a16="http://schemas.microsoft.com/office/drawing/2014/main" id="{7FCEAEFD-E5FE-4FAF-B728-A9BEF89657F3}"/>
               </a:ext>
             </a:extLst>
           </p:cNvPr>
@@ -4926,7 +4926,7 @@
           <p:nvPr/>
         </p:nvPicPr>
         <p:blipFill>
-          <a:blip xmlns:r="http://schemas.openxmlformats.org/officeDocument/2006/relationships" xmlns:a="http://schemas.openxmlformats.org/drawingml/2006/main" r:embed="Rda4670abfc8e44fa"/>
+          <a:blip xmlns:r="http://schemas.openxmlformats.org/officeDocument/2006/relationships" xmlns:a="http://schemas.openxmlformats.org/drawingml/2006/main" r:embed="R8400a9e5803f44a8"/>
           <a:stretch xmlns:a="http://schemas.openxmlformats.org/drawingml/2006/main"/>
         </p:blipFill>
         <p:spPr>
@@ -4944,7 +4944,7 @@
           <p:cNvPr id="7" name="sample-label">
             <a:extLst xmlns:a="http://schemas.openxmlformats.org/drawingml/2006/main">
               <a:ext uri="{FF2B5EF4-FFF2-40B4-BE49-F238E27FC236}">
-                <a16:creationId xmlns:a16="http://schemas.microsoft.com/office/drawing/2014/main" id="{FBD04043-6F43-4E18-904E-DD2E1CC965C9}"/>
+                <a16:creationId xmlns:a16="http://schemas.microsoft.com/office/drawing/2014/main" id="{2A21790F-FDDD-4165-8FD6-239137A4C831}"/>
               </a:ext>
             </a:extLst>
           </p:cNvPr>
@@ -5003,7 +5003,7 @@
     </p:spTree>
     <p:extLst>
       <p:ext uri="{BB962C8B-B14F-4D97-AF65-F5344CB8AC3E}">
-        <p14:creationId xmlns:p14="http://schemas.microsoft.com/office/powerpoint/2010/main" val="1081454882"/>
+        <p14:creationId xmlns:p14="http://schemas.microsoft.com/office/powerpoint/2010/main" val="1894278546"/>
       </p:ext>
     </p:extLst>
   </p:cSld>
@@ -5034,7 +5034,7 @@
           <p:cNvPr id="8" name="slide-number">
             <a:extLst xmlns:a="http://schemas.openxmlformats.org/drawingml/2006/main">
               <a:ext uri="{FF2B5EF4-FFF2-40B4-BE49-F238E27FC236}">
-                <a16:creationId xmlns:a16="http://schemas.microsoft.com/office/drawing/2014/main" id="{7266A968-B762-4EF5-98CA-FDE4494FC757}"/>
+                <a16:creationId xmlns:a16="http://schemas.microsoft.com/office/drawing/2014/main" id="{7E4DA758-CF75-459A-869B-53C55E84BF82}"/>
               </a:ext>
             </a:extLst>
           </p:cNvPr>
@@ -5095,7 +5095,7 @@
           <p:cNvPr id="2" name="section-label">
             <a:extLst xmlns:a="http://schemas.openxmlformats.org/drawingml/2006/main">
               <a:ext uri="{FF2B5EF4-FFF2-40B4-BE49-F238E27FC236}">
-                <a16:creationId xmlns:a16="http://schemas.microsoft.com/office/drawing/2014/main" id="{2F3703CA-052D-4BEE-A066-8C7FD712F099}"/>
+                <a16:creationId xmlns:a16="http://schemas.microsoft.com/office/drawing/2014/main" id="{60FBD816-F314-4599-BCBC-F728BF446F5F}"/>
               </a:ext>
             </a:extLst>
           </p:cNvPr>
@@ -5156,7 +5156,7 @@
           <p:cNvPr id="3" name="headline">
             <a:extLst xmlns:a="http://schemas.openxmlformats.org/drawingml/2006/main">
               <a:ext uri="{FF2B5EF4-FFF2-40B4-BE49-F238E27FC236}">
-                <a16:creationId xmlns:a16="http://schemas.microsoft.com/office/drawing/2014/main" id="{1449FA7C-6648-4B96-AF0E-405DF8ABC0B2}"/>
+                <a16:creationId xmlns:a16="http://schemas.microsoft.com/office/drawing/2014/main" id="{FFDBC860-B2EC-4180-888B-09C0F2BD9038}"/>
               </a:ext>
             </a:extLst>
           </p:cNvPr>
@@ -5244,7 +5244,7 @@
           <p:cNvPr id="4" name="oak-observation">
             <a:extLst xmlns:a="http://schemas.openxmlformats.org/drawingml/2006/main">
               <a:ext uri="{FF2B5EF4-FFF2-40B4-BE49-F238E27FC236}">
-                <a16:creationId xmlns:a16="http://schemas.microsoft.com/office/drawing/2014/main" id="{F5C8B14C-5E34-48B1-9998-78EED26F697B}"/>
+                <a16:creationId xmlns:a16="http://schemas.microsoft.com/office/drawing/2014/main" id="{6B3D66E1-5B1E-493D-831A-491D23B037CB}"/>
               </a:ext>
             </a:extLst>
           </p:cNvPr>
@@ -5305,7 +5305,7 @@
           <p:cNvPr id="5" name="oak-rationale">
             <a:extLst xmlns:a="http://schemas.openxmlformats.org/drawingml/2006/main">
               <a:ext uri="{FF2B5EF4-FFF2-40B4-BE49-F238E27FC236}">
-                <a16:creationId xmlns:a16="http://schemas.microsoft.com/office/drawing/2014/main" id="{D0075C85-AF86-40C7-9FE1-1CEC902FE3A6}"/>
+                <a16:creationId xmlns:a16="http://schemas.microsoft.com/office/drawing/2014/main" id="{33614EEE-D16D-4FF3-A662-4B5DAA76DD59}"/>
               </a:ext>
             </a:extLst>
           </p:cNvPr>
@@ -5366,7 +5366,7 @@
           <p:cNvPr id="6" name="oak-stage">
             <a:extLst xmlns:a="http://schemas.openxmlformats.org/drawingml/2006/main">
               <a:ext uri="{FF2B5EF4-FFF2-40B4-BE49-F238E27FC236}">
-                <a16:creationId xmlns:a16="http://schemas.microsoft.com/office/drawing/2014/main" id="{D9029060-2A48-4620-9542-0BD3147115B8}"/>
+                <a16:creationId xmlns:a16="http://schemas.microsoft.com/office/drawing/2014/main" id="{D11CD25D-10A8-44F9-8E66-32E49BFD8490}"/>
               </a:ext>
             </a:extLst>
           </p:cNvPr>
@@ -5431,7 +5431,7 @@
           <p:nvPr/>
         </p:nvPicPr>
         <p:blipFill>
-          <a:blip xmlns:r="http://schemas.openxmlformats.org/officeDocument/2006/relationships" xmlns:a="http://schemas.openxmlformats.org/drawingml/2006/main" r:embed="R0522dc76a92f45d9"/>
+          <a:blip xmlns:r="http://schemas.openxmlformats.org/officeDocument/2006/relationships" xmlns:a="http://schemas.openxmlformats.org/drawingml/2006/main" r:embed="R3f427a66e89b46c8"/>
           <a:stretch xmlns:a="http://schemas.openxmlformats.org/drawingml/2006/main"/>
         </p:blipFill>
         <p:spPr>
@@ -5447,7 +5447,7 @@
     </p:spTree>
     <p:extLst>
       <p:ext uri="{BB962C8B-B14F-4D97-AF65-F5344CB8AC3E}">
-        <p14:creationId xmlns:p14="http://schemas.microsoft.com/office/powerpoint/2010/main" val="979266841"/>
+        <p14:creationId xmlns:p14="http://schemas.microsoft.com/office/powerpoint/2010/main" val="810396139"/>
       </p:ext>
     </p:extLst>
   </p:cSld>
@@ -5478,7 +5478,7 @@
           <p:cNvPr id="13" name="slide-number">
             <a:extLst xmlns:a="http://schemas.openxmlformats.org/drawingml/2006/main">
               <a:ext uri="{FF2B5EF4-FFF2-40B4-BE49-F238E27FC236}">
-                <a16:creationId xmlns:a16="http://schemas.microsoft.com/office/drawing/2014/main" id="{0EEC239C-638B-462F-99ED-51EAF44CFDB5}"/>
+                <a16:creationId xmlns:a16="http://schemas.microsoft.com/office/drawing/2014/main" id="{8D193A52-7461-49EF-A2AD-F919D665A682}"/>
               </a:ext>
             </a:extLst>
           </p:cNvPr>
@@ -5539,7 +5539,7 @@
           <p:cNvPr id="2" name="section-label">
             <a:extLst xmlns:a="http://schemas.openxmlformats.org/drawingml/2006/main">
               <a:ext uri="{FF2B5EF4-FFF2-40B4-BE49-F238E27FC236}">
-                <a16:creationId xmlns:a16="http://schemas.microsoft.com/office/drawing/2014/main" id="{DD3DB253-74F1-4276-AD22-B428D1A0BAC1}"/>
+                <a16:creationId xmlns:a16="http://schemas.microsoft.com/office/drawing/2014/main" id="{1317D2B6-2D0F-42EA-8033-FA4112BA6079}"/>
               </a:ext>
             </a:extLst>
           </p:cNvPr>
@@ -5600,7 +5600,7 @@
           <p:cNvPr id="3" name="headline">
             <a:extLst xmlns:a="http://schemas.openxmlformats.org/drawingml/2006/main">
               <a:ext uri="{FF2B5EF4-FFF2-40B4-BE49-F238E27FC236}">
-                <a16:creationId xmlns:a16="http://schemas.microsoft.com/office/drawing/2014/main" id="{58DD7D09-F02B-4909-8115-672F4A3EC76B}"/>
+                <a16:creationId xmlns:a16="http://schemas.microsoft.com/office/drawing/2014/main" id="{A3EC6DD5-D8F8-44E9-A662-4940FA2EC990}"/>
               </a:ext>
             </a:extLst>
           </p:cNvPr>
@@ -5688,7 +5688,7 @@
           <p:cNvPr id="4" name="oak-error-decision">
             <a:extLst xmlns:a="http://schemas.openxmlformats.org/drawingml/2006/main">
               <a:ext uri="{FF2B5EF4-FFF2-40B4-BE49-F238E27FC236}">
-                <a16:creationId xmlns:a16="http://schemas.microsoft.com/office/drawing/2014/main" id="{11C47E6C-4F3E-441A-A127-015AEF4B423C}"/>
+                <a16:creationId xmlns:a16="http://schemas.microsoft.com/office/drawing/2014/main" id="{D4327DB8-244E-477C-A5D1-C4DE31360DA4}"/>
               </a:ext>
             </a:extLst>
           </p:cNvPr>
@@ -5739,7 +5739,7 @@
                 <a:ea typeface="Helvetica Neue"/>
                 <a:cs typeface="Helvetica Neue"/>
               </a:rPr>
-              <a:t>I made the correction visible where a person could act on it.</a:t>
+              <a:t>I made the problem field visible where a person could act on it.</a:t>
             </a:r>
           </a:p>
         </p:txBody>
@@ -5749,7 +5749,7 @@
           <p:cNvPr id="5" name="oak-error-outcome">
             <a:extLst xmlns:a="http://schemas.openxmlformats.org/drawingml/2006/main">
               <a:ext uri="{FF2B5EF4-FFF2-40B4-BE49-F238E27FC236}">
-                <a16:creationId xmlns:a16="http://schemas.microsoft.com/office/drawing/2014/main" id="{40FF0235-3277-4835-8EBC-CF88049DA77E}"/>
+                <a16:creationId xmlns:a16="http://schemas.microsoft.com/office/drawing/2014/main" id="{05209FDC-426C-47D1-8592-8A2DC5B28247}"/>
               </a:ext>
             </a:extLst>
           </p:cNvPr>
@@ -5810,7 +5810,7 @@
           <p:cNvPr id="6" name="before-label">
             <a:extLst xmlns:a="http://schemas.openxmlformats.org/drawingml/2006/main">
               <a:ext uri="{FF2B5EF4-FFF2-40B4-BE49-F238E27FC236}">
-                <a16:creationId xmlns:a16="http://schemas.microsoft.com/office/drawing/2014/main" id="{C459A89B-70AF-4D08-A721-24D80BC7BB17}"/>
+                <a16:creationId xmlns:a16="http://schemas.microsoft.com/office/drawing/2014/main" id="{D7EF5E1B-3EBC-407A-AE7E-AE56FB2B70E0}"/>
               </a:ext>
             </a:extLst>
           </p:cNvPr>
@@ -5871,7 +5871,7 @@
           <p:cNvPr id="7" name="after-label">
             <a:extLst xmlns:a="http://schemas.openxmlformats.org/drawingml/2006/main">
               <a:ext uri="{FF2B5EF4-FFF2-40B4-BE49-F238E27FC236}">
-                <a16:creationId xmlns:a16="http://schemas.microsoft.com/office/drawing/2014/main" id="{466AFDCA-2BC4-434D-B64C-899808598C05}"/>
+                <a16:creationId xmlns:a16="http://schemas.microsoft.com/office/drawing/2014/main" id="{76B5546B-00E7-4D41-B78F-74C991996400}"/>
               </a:ext>
             </a:extLst>
           </p:cNvPr>
@@ -5936,7 +5936,7 @@
           <p:nvPr/>
         </p:nvPicPr>
         <p:blipFill>
-          <a:blip xmlns:r="http://schemas.openxmlformats.org/officeDocument/2006/relationships" xmlns:a="http://schemas.openxmlformats.org/drawingml/2006/main" r:embed="Rd51ca9d333e141ec"/>
+          <a:blip xmlns:r="http://schemas.openxmlformats.org/officeDocument/2006/relationships" xmlns:a="http://schemas.openxmlformats.org/drawingml/2006/main" r:embed="R502d920dc6614ce7"/>
           <a:stretch xmlns:a="http://schemas.openxmlformats.org/drawingml/2006/main"/>
         </p:blipFill>
         <p:spPr>
@@ -5958,7 +5958,7 @@
           <p:nvPr/>
         </p:nvPicPr>
         <p:blipFill>
-          <a:blip xmlns:r="http://schemas.openxmlformats.org/officeDocument/2006/relationships" xmlns:a="http://schemas.openxmlformats.org/drawingml/2006/main" r:embed="R1bb9942b132340e7"/>
+          <a:blip xmlns:r="http://schemas.openxmlformats.org/officeDocument/2006/relationships" xmlns:a="http://schemas.openxmlformats.org/drawingml/2006/main" r:embed="R287fed1b19724a69"/>
           <a:stretch xmlns:a="http://schemas.openxmlformats.org/drawingml/2006/main"/>
         </p:blipFill>
         <p:spPr>
@@ -5976,7 +5976,7 @@
           <p:cNvPr id="10" name="footer-label">
             <a:extLst xmlns:a="http://schemas.openxmlformats.org/drawingml/2006/main">
               <a:ext uri="{FF2B5EF4-FFF2-40B4-BE49-F238E27FC236}">
-                <a16:creationId xmlns:a16="http://schemas.microsoft.com/office/drawing/2014/main" id="{6E1EEFA6-6861-4089-886E-A9FFA6416978}"/>
+                <a16:creationId xmlns:a16="http://schemas.microsoft.com/office/drawing/2014/main" id="{94440B31-1940-4AD9-B96F-97326B698058}"/>
               </a:ext>
             </a:extLst>
           </p:cNvPr>
@@ -6041,7 +6041,7 @@
           <p:nvPr/>
         </p:nvPicPr>
         <p:blipFill>
-          <a:blip xmlns:r="http://schemas.openxmlformats.org/officeDocument/2006/relationships" xmlns:a="http://schemas.openxmlformats.org/drawingml/2006/main" r:embed="R09e4b7d90bba445c"/>
+          <a:blip xmlns:r="http://schemas.openxmlformats.org/officeDocument/2006/relationships" xmlns:a="http://schemas.openxmlformats.org/drawingml/2006/main" r:embed="Raca85ab144f24be4"/>
           <a:stretch xmlns:a="http://schemas.openxmlformats.org/drawingml/2006/main"/>
         </p:blipFill>
         <p:spPr>
@@ -6059,7 +6059,7 @@
           <p:cNvPr id="12" name="field-label">
             <a:extLst xmlns:a="http://schemas.openxmlformats.org/drawingml/2006/main">
               <a:ext uri="{FF2B5EF4-FFF2-40B4-BE49-F238E27FC236}">
-                <a16:creationId xmlns:a16="http://schemas.microsoft.com/office/drawing/2014/main" id="{9DFAE8D5-D8F2-4BEF-A362-5231E9E8E722}"/>
+                <a16:creationId xmlns:a16="http://schemas.microsoft.com/office/drawing/2014/main" id="{52C6581C-9673-41DF-B3E5-34B19C7F69E2}"/>
               </a:ext>
             </a:extLst>
           </p:cNvPr>
@@ -6118,7 +6118,7 @@
     </p:spTree>
     <p:extLst>
       <p:ext uri="{BB962C8B-B14F-4D97-AF65-F5344CB8AC3E}">
-        <p14:creationId xmlns:p14="http://schemas.microsoft.com/office/powerpoint/2010/main" val="263385835"/>
+        <p14:creationId xmlns:p14="http://schemas.microsoft.com/office/powerpoint/2010/main" val="433216434"/>
       </p:ext>
     </p:extLst>
   </p:cSld>
@@ -6149,7 +6149,7 @@
           <p:cNvPr id="9" name="slide-number">
             <a:extLst xmlns:a="http://schemas.openxmlformats.org/drawingml/2006/main">
               <a:ext uri="{FF2B5EF4-FFF2-40B4-BE49-F238E27FC236}">
-                <a16:creationId xmlns:a16="http://schemas.microsoft.com/office/drawing/2014/main" id="{2B26B79E-EEF1-41D5-B98C-B8D1C41C51A5}"/>
+                <a16:creationId xmlns:a16="http://schemas.microsoft.com/office/drawing/2014/main" id="{3F999CA6-BA9B-4C29-B9C3-9EA95C2299A0}"/>
               </a:ext>
             </a:extLst>
           </p:cNvPr>
@@ -6210,7 +6210,7 @@
           <p:cNvPr id="2" name="story-image-surface">
             <a:extLst xmlns:a="http://schemas.openxmlformats.org/drawingml/2006/main">
               <a:ext uri="{FF2B5EF4-FFF2-40B4-BE49-F238E27FC236}">
-                <a16:creationId xmlns:a16="http://schemas.microsoft.com/office/drawing/2014/main" id="{E33A4DC0-790E-49A4-966A-E5DB2F5B8B1F}"/>
+                <a16:creationId xmlns:a16="http://schemas.microsoft.com/office/drawing/2014/main" id="{37C295FC-37B4-414D-B043-F385475C305D}"/>
               </a:ext>
             </a:extLst>
           </p:cNvPr>
@@ -6244,7 +6244,7 @@
           <p:nvPr/>
         </p:nvPicPr>
         <p:blipFill>
-          <a:blip xmlns:r="http://schemas.openxmlformats.org/officeDocument/2006/relationships" xmlns:a="http://schemas.openxmlformats.org/drawingml/2006/main" r:embed="R323083ba724648f4"/>
+          <a:blip xmlns:r="http://schemas.openxmlformats.org/officeDocument/2006/relationships" xmlns:a="http://schemas.openxmlformats.org/drawingml/2006/main" r:embed="R6cdbc1db358d44d8"/>
           <a:stretch xmlns:a="http://schemas.openxmlformats.org/drawingml/2006/main"/>
         </p:blipFill>
         <p:spPr>
@@ -6262,7 +6262,7 @@
           <p:cNvPr id="4" name="section-label">
             <a:extLst xmlns:a="http://schemas.openxmlformats.org/drawingml/2006/main">
               <a:ext uri="{FF2B5EF4-FFF2-40B4-BE49-F238E27FC236}">
-                <a16:creationId xmlns:a16="http://schemas.microsoft.com/office/drawing/2014/main" id="{3E9FA02C-9DFF-4517-9C4E-A3252A1EB198}"/>
+                <a16:creationId xmlns:a16="http://schemas.microsoft.com/office/drawing/2014/main" id="{BA4FA6FD-61E6-4FFB-B8C0-65202C8141BD}"/>
               </a:ext>
             </a:extLst>
           </p:cNvPr>
@@ -6323,7 +6323,7 @@
           <p:cNvPr id="5" name="headline">
             <a:extLst xmlns:a="http://schemas.openxmlformats.org/drawingml/2006/main">
               <a:ext uri="{FF2B5EF4-FFF2-40B4-BE49-F238E27FC236}">
-                <a16:creationId xmlns:a16="http://schemas.microsoft.com/office/drawing/2014/main" id="{D0038FB7-07E3-497A-AE14-951DC17C784F}"/>
+                <a16:creationId xmlns:a16="http://schemas.microsoft.com/office/drawing/2014/main" id="{2518CD23-CC52-4972-A456-EE8C3A80F789}"/>
               </a:ext>
             </a:extLst>
           </p:cNvPr>
@@ -6411,7 +6411,7 @@
           <p:cNvPr id="6" name="story-documentary">
             <a:extLst xmlns:a="http://schemas.openxmlformats.org/drawingml/2006/main">
               <a:ext uri="{FF2B5EF4-FFF2-40B4-BE49-F238E27FC236}">
-                <a16:creationId xmlns:a16="http://schemas.microsoft.com/office/drawing/2014/main" id="{3CD81C7A-AC02-4BFA-99D1-E087C393ABA2}"/>
+                <a16:creationId xmlns:a16="http://schemas.microsoft.com/office/drawing/2014/main" id="{DA10119D-22FB-4ADB-A8C1-F0CC3463A42E}"/>
               </a:ext>
             </a:extLst>
           </p:cNvPr>
@@ -6472,7 +6472,7 @@
           <p:cNvPr id="7" name="story-now">
             <a:extLst xmlns:a="http://schemas.openxmlformats.org/drawingml/2006/main">
               <a:ext uri="{FF2B5EF4-FFF2-40B4-BE49-F238E27FC236}">
-                <a16:creationId xmlns:a16="http://schemas.microsoft.com/office/drawing/2014/main" id="{7C737751-E2FC-4396-B483-3515D32B3920}"/>
+                <a16:creationId xmlns:a16="http://schemas.microsoft.com/office/drawing/2014/main" id="{1960B4BF-794C-42F4-9AD9-2014CDAAE56E}"/>
               </a:ext>
             </a:extLst>
           </p:cNvPr>
@@ -6533,7 +6533,7 @@
           <p:cNvPr id="8" name="story-slide-number">
             <a:extLst xmlns:a="http://schemas.openxmlformats.org/drawingml/2006/main">
               <a:ext uri="{FF2B5EF4-FFF2-40B4-BE49-F238E27FC236}">
-                <a16:creationId xmlns:a16="http://schemas.microsoft.com/office/drawing/2014/main" id="{C4DFB6F9-ECB4-4831-A783-B51FCE164410}"/>
+                <a16:creationId xmlns:a16="http://schemas.microsoft.com/office/drawing/2014/main" id="{DD69DACD-7448-4426-A4BB-0DDC7F3936FE}"/>
               </a:ext>
             </a:extLst>
           </p:cNvPr>
@@ -6592,7 +6592,7 @@
     </p:spTree>
     <p:extLst>
       <p:ext uri="{BB962C8B-B14F-4D97-AF65-F5344CB8AC3E}">
-        <p14:creationId xmlns:p14="http://schemas.microsoft.com/office/powerpoint/2010/main" val="1816358066"/>
+        <p14:creationId xmlns:p14="http://schemas.microsoft.com/office/powerpoint/2010/main" val="853056310"/>
       </p:ext>
     </p:extLst>
   </p:cSld>

--- a/downloads/design/kyle-hobson-design-deck.pptx
+++ b/downloads/design/kyle-hobson-design-deck.pptx
@@ -2,22 +2,22 @@
 <file path=ppt/presentation.xml><?xml version="1.0" encoding="utf-8"?>
 <p:presentation xmlns:p="http://schemas.openxmlformats.org/presentationml/2006/main">
   <p:sldMasterIdLst>
-    <p:sldMasterId xmlns:r="http://schemas.openxmlformats.org/officeDocument/2006/relationships" id="2147483648" r:id="Rd4a4a6cdc4434ee0"/>
+    <p:sldMasterId xmlns:r="http://schemas.openxmlformats.org/officeDocument/2006/relationships" id="2147483648" r:id="R79f0d73102aa41b2"/>
   </p:sldMasterIdLst>
   <p:notesMasterIdLst>
-    <p:notesMasterId xmlns:r="http://schemas.openxmlformats.org/officeDocument/2006/relationships" r:id="R54e49a45bd1b4d88"/>
+    <p:notesMasterId xmlns:r="http://schemas.openxmlformats.org/officeDocument/2006/relationships" r:id="R84baf6d247254f23"/>
   </p:notesMasterIdLst>
   <p:sldIdLst>
-    <p:sldId xmlns:r="http://schemas.openxmlformats.org/officeDocument/2006/relationships" id="256" r:id="Rc55d2dae5da346f9"/>
-    <p:sldId xmlns:r="http://schemas.openxmlformats.org/officeDocument/2006/relationships" id="257" r:id="Rd0161f1a86324e7c"/>
-    <p:sldId xmlns:r="http://schemas.openxmlformats.org/officeDocument/2006/relationships" id="258" r:id="R2aa54f7e85b34425"/>
-    <p:sldId xmlns:r="http://schemas.openxmlformats.org/officeDocument/2006/relationships" id="259" r:id="Rf2d4a4384a434a77"/>
-    <p:sldId xmlns:r="http://schemas.openxmlformats.org/officeDocument/2006/relationships" id="260" r:id="Re0c53f9a07634495"/>
-    <p:sldId xmlns:r="http://schemas.openxmlformats.org/officeDocument/2006/relationships" id="261" r:id="R55fb3cac46794274"/>
-    <p:sldId xmlns:r="http://schemas.openxmlformats.org/officeDocument/2006/relationships" id="262" r:id="Rd98fe14cea53497c"/>
-    <p:sldId xmlns:r="http://schemas.openxmlformats.org/officeDocument/2006/relationships" id="263" r:id="R74a50880471b4848"/>
-    <p:sldId xmlns:r="http://schemas.openxmlformats.org/officeDocument/2006/relationships" id="264" r:id="R8d4fe22f85d24523"/>
-    <p:sldId xmlns:r="http://schemas.openxmlformats.org/officeDocument/2006/relationships" id="265" r:id="R9b70fcae2197455a"/>
+    <p:sldId xmlns:r="http://schemas.openxmlformats.org/officeDocument/2006/relationships" id="256" r:id="R4efa74b12f474da2"/>
+    <p:sldId xmlns:r="http://schemas.openxmlformats.org/officeDocument/2006/relationships" id="257" r:id="R050da16364954fe2"/>
+    <p:sldId xmlns:r="http://schemas.openxmlformats.org/officeDocument/2006/relationships" id="258" r:id="Re4904e3ed62c4d45"/>
+    <p:sldId xmlns:r="http://schemas.openxmlformats.org/officeDocument/2006/relationships" id="259" r:id="R80908d3b6d654cef"/>
+    <p:sldId xmlns:r="http://schemas.openxmlformats.org/officeDocument/2006/relationships" id="260" r:id="R1657ad01f67b443d"/>
+    <p:sldId xmlns:r="http://schemas.openxmlformats.org/officeDocument/2006/relationships" id="261" r:id="Rb51362207b4943c8"/>
+    <p:sldId xmlns:r="http://schemas.openxmlformats.org/officeDocument/2006/relationships" id="262" r:id="R72ff799b85574134"/>
+    <p:sldId xmlns:r="http://schemas.openxmlformats.org/officeDocument/2006/relationships" id="263" r:id="R87030004ced44d00"/>
+    <p:sldId xmlns:r="http://schemas.openxmlformats.org/officeDocument/2006/relationships" id="264" r:id="Rb47af1f17a7f4b4d"/>
+    <p:sldId xmlns:r="http://schemas.openxmlformats.org/officeDocument/2006/relationships" id="265" r:id="R101852f7d6a24165"/>
   </p:sldIdLst>
   <p:sldSz cx="12192000" cy="6858000"/>
   <p:notesSz cx="6858000" cy="9144000"/>
@@ -591,7 +591,7 @@
           <a:lstStyle xmlns:a="http://schemas.openxmlformats.org/drawingml/2006/main"/>
           <a:p xmlns:a="http://schemas.openxmlformats.org/drawingml/2006/main">
             <a:r>
-              <a:t>Case: Flint, SmartTagIt at FactorLab. Kyle: UX Designer &amp; Researcher (Contract), 2025–2026. Source: original mobile design export, question suggestions and project walkthroughs. Work stage: design deliverables and engineering handoff. These examples document designed states, not a claim that every variant shipped.</a:t>
+              <a:t>Case: Flint, SmartTagIt at FactorLab. Kyle: UX Designer &amp; Researcher (Contract), 2025–2026. Source: original embedded screenshots from factorlab-slides-v1-2, page 4, visually compared with the current Google Slides source. The older interface uses an empty question field and category controls. My revised design shows concrete suggested questions and an example filled into the input for review or editing. The broader question library remains available. This comparison shows a design decision, not a measured gain or proof of the released navigation layout. The companion mobile entry remains in the website case study.</a:t>
             </a:r>
           </a:p>
         </p:txBody>
@@ -731,7 +731,7 @@
           <a:lstStyle xmlns:a="http://schemas.openxmlformats.org/drawingml/2006/main"/>
           <a:p xmlns:a="http://schemas.openxmlformats.org/drawingml/2006/main">
             <a:r>
-              <a:t>Source: selected original Flint interrupted-response and offline design variants, including the March 27, 2026 error-state handoff. Distinct recovery actions follow the state: Ask again or Continue for a partial response, and retry after connection loss with the question preserved. Deliverable: connected flows, interaction states and engineering annotations.</a:t>
+              <a:t>Source: selected original Flint interrupted-response and offline design variants, including the March 27, 2026 error-state handoff. Distinct recovery actions follow the state: Ask again or Continue for a partial response, and retry after connection loss with the question preserved. Deliverable: connected flows, interaction states and engineering annotations. An August 3, 2026 engineering reply reports Ask a Question error states implemented to approved Figma; AI Assist still used older patterns. This is an implementation report, not independent behavior testing or a measured recovery improvement.</a:t>
             </a:r>
           </a:p>
         </p:txBody>
@@ -1011,7 +1011,7 @@
           <a:lstStyle xmlns:a="http://schemas.openxmlformats.org/drawingml/2006/main"/>
           <a:p xmlns:a="http://schemas.openxmlformats.org/drawingml/2006/main">
             <a:r>
-              <a:t>Source: original Oak error-message recommendation artifact containing Before and After panels. Displayed interface panels retain source pixels and are labeled Original and Proposed to clarify the work state. Kyle connected an evaluation finding to visual alternatives and implementation recommendations. No conversion or task-success percentage is asserted.</a:t>
+              <a:t>Sources: original Oak desktop evaluation and error-messaging recommendation artifact. The shown crops retain original interface pixels and exclude the identity-bearing example field. Original and Proposed labels distinguish the existing interface from the recommendation. The evaluation identified error feedback that did not explain recovery, and the recommendation made a specific correction visible near the password field. This is a recommendation, not a measured usability improvement or a claim that the exact variant shipped.</a:t>
             </a:r>
           </a:p>
         </p:txBody>
@@ -1149,7 +1149,7 @@
   </p:cSld>
   <p:clrMap bg1="lt1" tx1="dk1" bg2="lt2" tx2="dk2" accent1="accent1" accent2="accent2" accent3="accent3" accent4="accent4" accent5="accent5" accent6="accent6" hlink="hlink" folHlink="folHlink"/>
   <p:sldLayoutIdLst>
-    <p:sldLayoutId xmlns:r="http://schemas.openxmlformats.org/officeDocument/2006/relationships" id="2147483649" r:id="R8a3a50e2e54143ec"/>
+    <p:sldLayoutId xmlns:r="http://schemas.openxmlformats.org/officeDocument/2006/relationships" id="2147483649" r:id="R8eca8c93d6bf4055"/>
   </p:sldLayoutIdLst>
   <p:txStyles>
     <p:titleStyle>
@@ -1700,7 +1700,7 @@
           <p:cNvPr id="8" name="slide-number">
             <a:extLst xmlns:a="http://schemas.openxmlformats.org/drawingml/2006/main">
               <a:ext uri="{FF2B5EF4-FFF2-40B4-BE49-F238E27FC236}">
-                <a16:creationId xmlns:a16="http://schemas.microsoft.com/office/drawing/2014/main" id="{492DE73A-0931-4DF0-B638-E78D03857ABB}"/>
+                <a16:creationId xmlns:a16="http://schemas.microsoft.com/office/drawing/2014/main" id="{1F0BBC27-41BF-4C4E-AAEE-C881D3369ABB}"/>
               </a:ext>
             </a:extLst>
           </p:cNvPr>
@@ -1761,7 +1761,7 @@
           <p:cNvPr id="2" name="section-label">
             <a:extLst xmlns:a="http://schemas.openxmlformats.org/drawingml/2006/main">
               <a:ext uri="{FF2B5EF4-FFF2-40B4-BE49-F238E27FC236}">
-                <a16:creationId xmlns:a16="http://schemas.microsoft.com/office/drawing/2014/main" id="{3C89E49E-2098-454A-9B0C-5DDBBD3A514A}"/>
+                <a16:creationId xmlns:a16="http://schemas.microsoft.com/office/drawing/2014/main" id="{7D114A45-0CDF-4244-B28F-F8E0531F458D}"/>
               </a:ext>
             </a:extLst>
           </p:cNvPr>
@@ -1822,7 +1822,7 @@
           <p:cNvPr id="3" name="headline">
             <a:extLst xmlns:a="http://schemas.openxmlformats.org/drawingml/2006/main">
               <a:ext uri="{FF2B5EF4-FFF2-40B4-BE49-F238E27FC236}">
-                <a16:creationId xmlns:a16="http://schemas.microsoft.com/office/drawing/2014/main" id="{A1051729-87CD-4B5D-915A-189732A894EA}"/>
+                <a16:creationId xmlns:a16="http://schemas.microsoft.com/office/drawing/2014/main" id="{B3D70E00-07C9-421D-9BC7-5981ACD0B420}"/>
               </a:ext>
             </a:extLst>
           </p:cNvPr>
@@ -1910,7 +1910,7 @@
           <p:cNvPr id="4" name="cover-intro">
             <a:extLst xmlns:a="http://schemas.openxmlformats.org/drawingml/2006/main">
               <a:ext uri="{FF2B5EF4-FFF2-40B4-BE49-F238E27FC236}">
-                <a16:creationId xmlns:a16="http://schemas.microsoft.com/office/drawing/2014/main" id="{C38A2793-DDE7-40B3-8B7D-8DA4C98027C0}"/>
+                <a16:creationId xmlns:a16="http://schemas.microsoft.com/office/drawing/2014/main" id="{A1BC3561-98DE-43CA-BADD-997C6BF97F76}"/>
               </a:ext>
             </a:extLst>
           </p:cNvPr>
@@ -1998,7 +1998,7 @@
           <p:cNvPr id="5" name="cover-accent">
             <a:extLst xmlns:a="http://schemas.openxmlformats.org/drawingml/2006/main">
               <a:ext uri="{FF2B5EF4-FFF2-40B4-BE49-F238E27FC236}">
-                <a16:creationId xmlns:a16="http://schemas.microsoft.com/office/drawing/2014/main" id="{38682704-A57D-4AF6-BF13-D9031F1ACD20}"/>
+                <a16:creationId xmlns:a16="http://schemas.microsoft.com/office/drawing/2014/main" id="{35F3D71A-E65A-467A-9EBD-C80044F5BB3F}"/>
               </a:ext>
             </a:extLst>
           </p:cNvPr>
@@ -2028,7 +2028,7 @@
           <p:cNvPr id="6" name="cover-type">
             <a:extLst xmlns:a="http://schemas.openxmlformats.org/drawingml/2006/main">
               <a:ext uri="{FF2B5EF4-FFF2-40B4-BE49-F238E27FC236}">
-                <a16:creationId xmlns:a16="http://schemas.microsoft.com/office/drawing/2014/main" id="{B7C11EB2-DFE4-4C9E-8DB5-EA1671C71F91}"/>
+                <a16:creationId xmlns:a16="http://schemas.microsoft.com/office/drawing/2014/main" id="{7CC9DA3F-0F38-40AA-985C-7B15108C99A6}"/>
               </a:ext>
             </a:extLst>
           </p:cNvPr>
@@ -2093,7 +2093,7 @@
           <p:nvPr/>
         </p:nvPicPr>
         <p:blipFill>
-          <a:blip xmlns:r="http://schemas.openxmlformats.org/officeDocument/2006/relationships" xmlns:a="http://schemas.openxmlformats.org/drawingml/2006/main" r:embed="R46d41c84d1d64525"/>
+          <a:blip xmlns:r="http://schemas.openxmlformats.org/officeDocument/2006/relationships" xmlns:a="http://schemas.openxmlformats.org/drawingml/2006/main" r:embed="R3c2af871e8834d0f"/>
           <a:stretch xmlns:a="http://schemas.openxmlformats.org/drawingml/2006/main"/>
         </p:blipFill>
         <p:spPr>
@@ -2109,7 +2109,7 @@
     </p:spTree>
     <p:extLst>
       <p:ext uri="{BB962C8B-B14F-4D97-AF65-F5344CB8AC3E}">
-        <p14:creationId xmlns:p14="http://schemas.microsoft.com/office/powerpoint/2010/main" val="127214222"/>
+        <p14:creationId xmlns:p14="http://schemas.microsoft.com/office/powerpoint/2010/main" val="1500851431"/>
       </p:ext>
     </p:extLst>
   </p:cSld>
@@ -2140,7 +2140,7 @@
           <p:cNvPr id="7" name="slide-number">
             <a:extLst xmlns:a="http://schemas.openxmlformats.org/drawingml/2006/main">
               <a:ext uri="{FF2B5EF4-FFF2-40B4-BE49-F238E27FC236}">
-                <a16:creationId xmlns:a16="http://schemas.microsoft.com/office/drawing/2014/main" id="{33DA02CC-7D93-4C40-8E3C-33CD347FD86B}"/>
+                <a16:creationId xmlns:a16="http://schemas.microsoft.com/office/drawing/2014/main" id="{0B488CB0-26C2-431E-9D76-0E12B4842218}"/>
               </a:ext>
             </a:extLst>
           </p:cNvPr>
@@ -2201,7 +2201,7 @@
           <p:cNvPr id="2" name="section-label">
             <a:extLst xmlns:a="http://schemas.openxmlformats.org/drawingml/2006/main">
               <a:ext uri="{FF2B5EF4-FFF2-40B4-BE49-F238E27FC236}">
-                <a16:creationId xmlns:a16="http://schemas.microsoft.com/office/drawing/2014/main" id="{2B60DB53-B8D4-4417-B748-57850CB6C055}"/>
+                <a16:creationId xmlns:a16="http://schemas.microsoft.com/office/drawing/2014/main" id="{DE9EBAB4-3AD9-4382-8472-5AF9B51A6B3F}"/>
               </a:ext>
             </a:extLst>
           </p:cNvPr>
@@ -2262,7 +2262,7 @@
           <p:cNvPr id="3" name="headline">
             <a:extLst xmlns:a="http://schemas.openxmlformats.org/drawingml/2006/main">
               <a:ext uri="{FF2B5EF4-FFF2-40B4-BE49-F238E27FC236}">
-                <a16:creationId xmlns:a16="http://schemas.microsoft.com/office/drawing/2014/main" id="{21C6EA93-3006-41D2-B301-6986DEBA6298}"/>
+                <a16:creationId xmlns:a16="http://schemas.microsoft.com/office/drawing/2014/main" id="{E1BD84CC-5A32-47FF-94E4-F024CEEC91EA}"/>
               </a:ext>
             </a:extLst>
           </p:cNvPr>
@@ -2350,7 +2350,7 @@
           <p:cNvPr id="4" name="contact-intent">
             <a:extLst xmlns:a="http://schemas.openxmlformats.org/drawingml/2006/main">
               <a:ext uri="{FF2B5EF4-FFF2-40B4-BE49-F238E27FC236}">
-                <a16:creationId xmlns:a16="http://schemas.microsoft.com/office/drawing/2014/main" id="{A7B82F83-C224-4802-814B-1CF06E64E1DF}"/>
+                <a16:creationId xmlns:a16="http://schemas.microsoft.com/office/drawing/2014/main" id="{08CD384F-63E9-4D3B-9397-9195A1141734}"/>
               </a:ext>
             </a:extLst>
           </p:cNvPr>
@@ -2411,7 +2411,7 @@
           <p:cNvPr id="5" name="email">
             <a:extLst xmlns:a="http://schemas.openxmlformats.org/drawingml/2006/main">
               <a:ext uri="{FF2B5EF4-FFF2-40B4-BE49-F238E27FC236}">
-                <a16:creationId xmlns:a16="http://schemas.microsoft.com/office/drawing/2014/main" id="{3F2E2C04-D732-46C4-AB44-C693BCD7222B}"/>
+                <a16:creationId xmlns:a16="http://schemas.microsoft.com/office/drawing/2014/main" id="{21EF4A04-5298-4D2E-8DAF-DD2F33B14540}"/>
               </a:ext>
             </a:extLst>
           </p:cNvPr>
@@ -2461,7 +2461,7 @@
                 <a:latin typeface="Helvetica Neue"/>
                 <a:ea typeface="Helvetica Neue"/>
                 <a:cs typeface="Helvetica Neue"/>
-                <a:hlinkClick xmlns:r="http://schemas.openxmlformats.org/officeDocument/2006/relationships" r:id="Rbec667ab4ce3484e"/>
+                <a:hlinkClick xmlns:r="http://schemas.openxmlformats.org/officeDocument/2006/relationships" r:id="R745909748ce1472f"/>
               </a:rPr>
               <a:t>JonathanKyleHobson@gmail.com</a:t>
             </a:r>
@@ -2473,7 +2473,7 @@
           <p:cNvPr id="6" name="public-profile">
             <a:extLst xmlns:a="http://schemas.openxmlformats.org/drawingml/2006/main">
               <a:ext uri="{FF2B5EF4-FFF2-40B4-BE49-F238E27FC236}">
-                <a16:creationId xmlns:a16="http://schemas.microsoft.com/office/drawing/2014/main" id="{E49186DC-4498-4C42-A16C-B5F9BF4691BA}"/>
+                <a16:creationId xmlns:a16="http://schemas.microsoft.com/office/drawing/2014/main" id="{C85944A0-37F6-499F-854C-63944ADEB32A}"/>
               </a:ext>
             </a:extLst>
           </p:cNvPr>
@@ -2523,7 +2523,7 @@
                 <a:latin typeface="Helvetica Neue"/>
                 <a:ea typeface="Helvetica Neue"/>
                 <a:cs typeface="Helvetica Neue"/>
-                <a:hlinkClick xmlns:r="http://schemas.openxmlformats.org/officeDocument/2006/relationships" r:id="Rc99a5a53ca064438"/>
+                <a:hlinkClick xmlns:r="http://schemas.openxmlformats.org/officeDocument/2006/relationships" r:id="R3ed980b11bfd471b"/>
               </a:rPr>
               <a:t>jonathankhobson.github.io/portfolio/design</a:t>
             </a:r>
@@ -2533,7 +2533,7 @@
     </p:spTree>
     <p:extLst>
       <p:ext uri="{BB962C8B-B14F-4D97-AF65-F5344CB8AC3E}">
-        <p14:creationId xmlns:p14="http://schemas.microsoft.com/office/powerpoint/2010/main" val="812961590"/>
+        <p14:creationId xmlns:p14="http://schemas.microsoft.com/office/powerpoint/2010/main" val="2067870962"/>
       </p:ext>
     </p:extLst>
   </p:cSld>
@@ -2561,10 +2561,10 @@
       </p:grpSpPr>
       <p:sp>
         <p:nvSpPr>
-          <p:cNvPr id="10" name="slide-number">
+          <p:cNvPr id="11" name="slide-number">
             <a:extLst xmlns:a="http://schemas.openxmlformats.org/drawingml/2006/main">
               <a:ext uri="{FF2B5EF4-FFF2-40B4-BE49-F238E27FC236}">
-                <a16:creationId xmlns:a16="http://schemas.microsoft.com/office/drawing/2014/main" id="{745AA609-2CA9-4007-9B7A-CBFC4D69F578}"/>
+                <a16:creationId xmlns:a16="http://schemas.microsoft.com/office/drawing/2014/main" id="{372D3DE5-3B7F-45B1-B487-43C4D9904355}"/>
               </a:ext>
             </a:extLst>
           </p:cNvPr>
@@ -2625,7 +2625,7 @@
           <p:cNvPr id="2" name="section-label">
             <a:extLst xmlns:a="http://schemas.openxmlformats.org/drawingml/2006/main">
               <a:ext uri="{FF2B5EF4-FFF2-40B4-BE49-F238E27FC236}">
-                <a16:creationId xmlns:a16="http://schemas.microsoft.com/office/drawing/2014/main" id="{700C287C-5FFC-40C5-ABDE-101BBF3FD22E}"/>
+                <a16:creationId xmlns:a16="http://schemas.microsoft.com/office/drawing/2014/main" id="{4D7A2245-B771-4BAB-A930-62C70133B3EE}"/>
               </a:ext>
             </a:extLst>
           </p:cNvPr>
@@ -2686,7 +2686,7 @@
           <p:cNvPr id="3" name="headline">
             <a:extLst xmlns:a="http://schemas.openxmlformats.org/drawingml/2006/main">
               <a:ext uri="{FF2B5EF4-FFF2-40B4-BE49-F238E27FC236}">
-                <a16:creationId xmlns:a16="http://schemas.microsoft.com/office/drawing/2014/main" id="{2E02C282-88BE-4257-BD76-875E363D018A}"/>
+                <a16:creationId xmlns:a16="http://schemas.microsoft.com/office/drawing/2014/main" id="{14AC98CF-4703-4D8B-8360-EBC126999CE0}"/>
               </a:ext>
             </a:extLst>
           </p:cNvPr>
@@ -2698,7 +2698,7 @@
         <p:spPr>
           <a:xfrm xmlns:a="http://schemas.openxmlformats.org/drawingml/2006/main">
             <a:off x="609600" y="1104900"/>
-            <a:ext cx="4953000" cy="1428750"/>
+            <a:ext cx="10953750" cy="800100"/>
           </a:xfrm>
           <a:prstGeom xmlns:a="http://schemas.openxmlformats.org/drawingml/2006/main" prst="rect">
             <a:avLst/>
@@ -2737,44 +2737,17 @@
                 <a:ea typeface="Helvetica Neue"/>
                 <a:cs typeface="Helvetica Neue"/>
               </a:rPr>
-              <a:t>A useful</a:t>
-            </a:r>
-          </a:p>
-          <a:p xmlns:a="http://schemas.openxmlformats.org/drawingml/2006/main">
-            <a:pPr>
-              <a:lnSpc>
-                <a:spcPct val="110000"/>
-              </a:lnSpc>
-              <a:buNone/>
-              <a:defRPr sz="3900" b="1">
-                <a:solidFill>
-                  <a:srgbClr val="192B25"/>
-                </a:solidFill>
-                <a:latin typeface="Helvetica Neue"/>
-                <a:ea typeface="Helvetica Neue"/>
-                <a:cs typeface="Helvetica Neue"/>
-              </a:defRPr>
-            </a:pPr>
-            <a:r>
-              <a:rPr sz="3900" b="1">
-                <a:solidFill>
-                  <a:srgbClr val="192B25"/>
-                </a:solidFill>
-                <a:latin typeface="Helvetica Neue"/>
-                <a:ea typeface="Helvetica Neue"/>
-                <a:cs typeface="Helvetica Neue"/>
-              </a:rPr>
-              <a:t>first question</a:t>
-            </a:r>
-          </a:p>
-        </p:txBody>
-      </p:sp>
-      <p:sp>
-        <p:nvSpPr>
-          <p:cNvPr id="4" name="role">
+              <a:t>A useful first question</a:t>
+            </a:r>
+          </a:p>
+        </p:txBody>
+      </p:sp>
+      <p:sp>
+        <p:nvSpPr>
+          <p:cNvPr id="4" name="before-label">
             <a:extLst xmlns:a="http://schemas.openxmlformats.org/drawingml/2006/main">
               <a:ext uri="{FF2B5EF4-FFF2-40B4-BE49-F238E27FC236}">
-                <a16:creationId xmlns:a16="http://schemas.microsoft.com/office/drawing/2014/main" id="{D2476ED9-8D8D-45EA-98A0-C4CCE6EF4CD0}"/>
+                <a16:creationId xmlns:a16="http://schemas.microsoft.com/office/drawing/2014/main" id="{BCAAE70F-D06C-4ED5-8D2D-A8915107B43C}"/>
               </a:ext>
             </a:extLst>
           </p:cNvPr>
@@ -2785,8 +2758,8 @@
         </p:nvSpPr>
         <p:spPr>
           <a:xfrm xmlns:a="http://schemas.openxmlformats.org/drawingml/2006/main">
-            <a:off x="609600" y="2705100"/>
-            <a:ext cx="5334000" cy="609600"/>
+            <a:off x="609600" y="2114550"/>
+            <a:ext cx="5048250" cy="257175"/>
           </a:xfrm>
           <a:prstGeom xmlns:a="http://schemas.openxmlformats.org/drawingml/2006/main" prst="rect">
             <a:avLst/>
@@ -2807,7 +2780,7 @@
                 <a:spcPct val="110000"/>
               </a:lnSpc>
               <a:buNone/>
-              <a:defRPr sz="1500" b="1">
+              <a:defRPr sz="1350" b="1">
                 <a:solidFill>
                   <a:srgbClr val="244D3C"/>
                 </a:solidFill>
@@ -2817,7 +2790,7 @@
               </a:defRPr>
             </a:pPr>
             <a:r>
-              <a:rPr sz="1500" b="1">
+              <a:rPr sz="1350" b="1">
                 <a:solidFill>
                   <a:srgbClr val="244D3C"/>
                 </a:solidFill>
@@ -2825,44 +2798,17 @@
                 <a:ea typeface="Helvetica Neue"/>
                 <a:cs typeface="Helvetica Neue"/>
               </a:rPr>
-              <a:t>UX Designer &amp; Researcher (Contract)</a:t>
-            </a:r>
-          </a:p>
-          <a:p xmlns:a="http://schemas.openxmlformats.org/drawingml/2006/main">
-            <a:pPr>
-              <a:lnSpc>
-                <a:spcPct val="110000"/>
-              </a:lnSpc>
-              <a:buNone/>
-              <a:defRPr sz="1500" b="1">
-                <a:solidFill>
-                  <a:srgbClr val="244D3C"/>
-                </a:solidFill>
-                <a:latin typeface="Helvetica Neue"/>
-                <a:ea typeface="Helvetica Neue"/>
-                <a:cs typeface="Helvetica Neue"/>
-              </a:defRPr>
-            </a:pPr>
-            <a:r>
-              <a:rPr sz="1500" b="1">
-                <a:solidFill>
-                  <a:srgbClr val="244D3C"/>
-                </a:solidFill>
-                <a:latin typeface="Helvetica Neue"/>
-                <a:ea typeface="Helvetica Neue"/>
-                <a:cs typeface="Helvetica Neue"/>
-              </a:rPr>
-              <a:t>2025–2026</a:t>
-            </a:r>
-          </a:p>
-        </p:txBody>
-      </p:sp>
-      <p:sp>
-        <p:nvSpPr>
-          <p:cNvPr id="5" name="entry-decision">
+              <a:t>BEFORE</a:t>
+            </a:r>
+          </a:p>
+        </p:txBody>
+      </p:sp>
+      <p:sp>
+        <p:nvSpPr>
+          <p:cNvPr id="5" name="after-label">
             <a:extLst xmlns:a="http://schemas.openxmlformats.org/drawingml/2006/main">
               <a:ext uri="{FF2B5EF4-FFF2-40B4-BE49-F238E27FC236}">
-                <a16:creationId xmlns:a16="http://schemas.microsoft.com/office/drawing/2014/main" id="{964767E5-4B96-412C-9AAE-3835443136A6}"/>
+                <a16:creationId xmlns:a16="http://schemas.microsoft.com/office/drawing/2014/main" id="{25223654-D297-4BE2-A96F-3782581124C6}"/>
               </a:ext>
             </a:extLst>
           </p:cNvPr>
@@ -2873,8 +2819,8 @@
         </p:nvSpPr>
         <p:spPr>
           <a:xfrm xmlns:a="http://schemas.openxmlformats.org/drawingml/2006/main">
-            <a:off x="609600" y="3676650"/>
-            <a:ext cx="4667250" cy="1362075"/>
+            <a:off x="6400800" y="2114550"/>
+            <a:ext cx="5181600" cy="257175"/>
           </a:xfrm>
           <a:prstGeom xmlns:a="http://schemas.openxmlformats.org/drawingml/2006/main" prst="rect">
             <a:avLst/>
@@ -2895,35 +2841,35 @@
                 <a:spcPct val="110000"/>
               </a:lnSpc>
               <a:buNone/>
-              <a:defRPr sz="2025" b="0">
-                <a:solidFill>
-                  <a:srgbClr val="192B25"/>
-                </a:solidFill>
-                <a:latin typeface="Helvetica Neue"/>
-                <a:ea typeface="Helvetica Neue"/>
-                <a:cs typeface="Helvetica Neue"/>
-              </a:defRPr>
-            </a:pPr>
-            <a:r>
-              <a:rPr sz="2025" b="0">
-                <a:solidFill>
-                  <a:srgbClr val="192B25"/>
-                </a:solidFill>
-                <a:latin typeface="Helvetica Neue"/>
-                <a:ea typeface="Helvetica Neue"/>
-                <a:cs typeface="Helvetica Neue"/>
-              </a:rPr>
-              <a:t>I explored suggested questions and a question library while keeping a person’s own question close at hand.</a:t>
-            </a:r>
-          </a:p>
-        </p:txBody>
-      </p:sp>
-      <p:sp>
-        <p:nvSpPr>
-          <p:cNvPr id="6" name="stage">
+              <a:defRPr sz="1350" b="1">
+                <a:solidFill>
+                  <a:srgbClr val="244D3C"/>
+                </a:solidFill>
+                <a:latin typeface="Helvetica Neue"/>
+                <a:ea typeface="Helvetica Neue"/>
+                <a:cs typeface="Helvetica Neue"/>
+              </a:defRPr>
+            </a:pPr>
+            <a:r>
+              <a:rPr sz="1350" b="1">
+                <a:solidFill>
+                  <a:srgbClr val="244D3C"/>
+                </a:solidFill>
+                <a:latin typeface="Helvetica Neue"/>
+                <a:ea typeface="Helvetica Neue"/>
+                <a:cs typeface="Helvetica Neue"/>
+              </a:rPr>
+              <a:t>MY DESIGN EXPLORATION</a:t>
+            </a:r>
+          </a:p>
+        </p:txBody>
+      </p:sp>
+      <p:sp>
+        <p:nvSpPr>
+          <p:cNvPr id="6" name="before-caption">
             <a:extLst xmlns:a="http://schemas.openxmlformats.org/drawingml/2006/main">
               <a:ext uri="{FF2B5EF4-FFF2-40B4-BE49-F238E27FC236}">
-                <a16:creationId xmlns:a16="http://schemas.microsoft.com/office/drawing/2014/main" id="{CD598423-7149-4D3C-A1F2-F34ED4680DD9}"/>
+                <a16:creationId xmlns:a16="http://schemas.microsoft.com/office/drawing/2014/main" id="{FD2A2869-B470-4F93-8484-83615D53F166}"/>
               </a:ext>
             </a:extLst>
           </p:cNvPr>
@@ -2934,8 +2880,8 @@
         </p:nvSpPr>
         <p:spPr>
           <a:xfrm xmlns:a="http://schemas.openxmlformats.org/drawingml/2006/main">
-            <a:off x="609600" y="5486400"/>
-            <a:ext cx="5219700" cy="304800"/>
+            <a:off x="609600" y="2505075"/>
+            <a:ext cx="5181600" cy="371475"/>
           </a:xfrm>
           <a:prstGeom xmlns:a="http://schemas.openxmlformats.org/drawingml/2006/main" prst="rect">
             <a:avLst/>
@@ -2956,35 +2902,35 @@
                 <a:spcPct val="110000"/>
               </a:lnSpc>
               <a:buNone/>
-              <a:defRPr sz="1350" b="0">
-                <a:solidFill>
-                  <a:srgbClr val="58645D"/>
-                </a:solidFill>
-                <a:latin typeface="Helvetica Neue"/>
-                <a:ea typeface="Helvetica Neue"/>
-                <a:cs typeface="Helvetica Neue"/>
-              </a:defRPr>
-            </a:pPr>
-            <a:r>
-              <a:rPr sz="1350" b="0">
-                <a:solidFill>
-                  <a:srgbClr val="58645D"/>
-                </a:solidFill>
-                <a:latin typeface="Helvetica Neue"/>
-                <a:ea typeface="Helvetica Neue"/>
-                <a:cs typeface="Helvetica Neue"/>
-              </a:rPr>
-              <a:t>Design deliverables and engineering handoff</a:t>
-            </a:r>
-          </a:p>
-        </p:txBody>
-      </p:sp>
-      <p:sp>
-        <p:nvSpPr>
-          <p:cNvPr id="7" name="entry-scope">
+              <a:defRPr sz="1725" b="0">
+                <a:solidFill>
+                  <a:srgbClr val="192B25"/>
+                </a:solidFill>
+                <a:latin typeface="Helvetica Neue"/>
+                <a:ea typeface="Helvetica Neue"/>
+                <a:cs typeface="Helvetica Neue"/>
+              </a:defRPr>
+            </a:pPr>
+            <a:r>
+              <a:rPr sz="1725" b="0">
+                <a:solidFill>
+                  <a:srgbClr val="192B25"/>
+                </a:solidFill>
+                <a:latin typeface="Helvetica Neue"/>
+                <a:ea typeface="Helvetica Neue"/>
+                <a:cs typeface="Helvetica Neue"/>
+              </a:rPr>
+              <a:t>An empty field and broad categories.</a:t>
+            </a:r>
+          </a:p>
+        </p:txBody>
+      </p:sp>
+      <p:sp>
+        <p:nvSpPr>
+          <p:cNvPr id="7" name="after-caption">
             <a:extLst xmlns:a="http://schemas.openxmlformats.org/drawingml/2006/main">
               <a:ext uri="{FF2B5EF4-FFF2-40B4-BE49-F238E27FC236}">
-                <a16:creationId xmlns:a16="http://schemas.microsoft.com/office/drawing/2014/main" id="{FFBD44B0-BA71-490E-90E1-D6C939D37258}"/>
+                <a16:creationId xmlns:a16="http://schemas.microsoft.com/office/drawing/2014/main" id="{B85A68A8-2AA6-4DEA-944E-47FBACD98F93}"/>
               </a:ext>
             </a:extLst>
           </p:cNvPr>
@@ -2995,8 +2941,8 @@
         </p:nvSpPr>
         <p:spPr>
           <a:xfrm xmlns:a="http://schemas.openxmlformats.org/drawingml/2006/main">
-            <a:off x="609600" y="5943600"/>
-            <a:ext cx="5048250" cy="304800"/>
+            <a:off x="6400800" y="2505075"/>
+            <a:ext cx="5181600" cy="371475"/>
           </a:xfrm>
           <a:prstGeom xmlns:a="http://schemas.openxmlformats.org/drawingml/2006/main" prst="rect">
             <a:avLst/>
@@ -3017,58 +2963,28 @@
                 <a:spcPct val="110000"/>
               </a:lnSpc>
               <a:buNone/>
-              <a:defRPr sz="1350" b="0">
-                <a:solidFill>
-                  <a:srgbClr val="58645D"/>
-                </a:solidFill>
-                <a:latin typeface="Helvetica Neue"/>
-                <a:ea typeface="Helvetica Neue"/>
-                <a:cs typeface="Helvetica Neue"/>
-              </a:defRPr>
-            </a:pPr>
-            <a:r>
-              <a:rPr sz="1350" b="0">
-                <a:solidFill>
-                  <a:srgbClr val="58645D"/>
-                </a:solidFill>
-                <a:latin typeface="Helvetica Neue"/>
-                <a:ea typeface="Helvetica Neue"/>
-                <a:cs typeface="Helvetica Neue"/>
-              </a:rPr>
-              <a:t>Mobile and desktop conversation flows</a:t>
-            </a:r>
-          </a:p>
-        </p:txBody>
-      </p:sp>
-      <p:sp>
-        <p:nvSpPr>
-          <p:cNvPr id="8" name="phone-surface">
-            <a:extLst xmlns:a="http://schemas.openxmlformats.org/drawingml/2006/main">
-              <a:ext uri="{FF2B5EF4-FFF2-40B4-BE49-F238E27FC236}">
-                <a16:creationId xmlns:a16="http://schemas.microsoft.com/office/drawing/2014/main" id="{89C8B721-FE91-49CF-BC3D-D3E65F0897F9}"/>
-              </a:ext>
-            </a:extLst>
-          </p:cNvPr>
-          <p:cNvSpPr>
-            <a:spLocks xmlns:a="http://schemas.openxmlformats.org/drawingml/2006/main" noGrp="1"/>
-          </p:cNvSpPr>
-          <p:nvPr/>
-        </p:nvSpPr>
-        <p:spPr>
-          <a:xfrm xmlns:a="http://schemas.openxmlformats.org/drawingml/2006/main">
-            <a:off x="7372350" y="847725"/>
-            <a:ext cx="3657600" cy="5514975"/>
-          </a:xfrm>
-          <a:prstGeom xmlns:a="http://schemas.openxmlformats.org/drawingml/2006/main" prst="rect">
-            <a:avLst/>
-          </a:prstGeom>
-          <a:solidFill xmlns:a="http://schemas.openxmlformats.org/drawingml/2006/main">
-            <a:srgbClr val="E1E8DB"/>
-          </a:solidFill>
-          <a:ln xmlns:a="http://schemas.openxmlformats.org/drawingml/2006/main" w="0">
-            <a:noFill/>
-          </a:ln>
-        </p:spPr>
+              <a:defRPr sz="1725" b="0">
+                <a:solidFill>
+                  <a:srgbClr val="192B25"/>
+                </a:solidFill>
+                <a:latin typeface="Helvetica Neue"/>
+                <a:ea typeface="Helvetica Neue"/>
+                <a:cs typeface="Helvetica Neue"/>
+              </a:defRPr>
+            </a:pPr>
+            <a:r>
+              <a:rPr sz="1725" b="0">
+                <a:solidFill>
+                  <a:srgbClr val="192B25"/>
+                </a:solidFill>
+                <a:latin typeface="Helvetica Neue"/>
+                <a:ea typeface="Helvetica Neue"/>
+                <a:cs typeface="Helvetica Neue"/>
+              </a:rPr>
+              <a:t>Specific suggestions, ready to edit.</a:t>
+            </a:r>
+          </a:p>
+        </p:txBody>
       </p:sp>
       <p:pic>
         <p:nvPicPr>
@@ -3079,23 +2995,106 @@
           <p:nvPr/>
         </p:nvPicPr>
         <p:blipFill>
-          <a:blip xmlns:r="http://schemas.openxmlformats.org/officeDocument/2006/relationships" xmlns:a="http://schemas.openxmlformats.org/drawingml/2006/main" r:embed="R08722bb7f8ed4c41"/>
+          <a:blip xmlns:r="http://schemas.openxmlformats.org/officeDocument/2006/relationships" xmlns:a="http://schemas.openxmlformats.org/drawingml/2006/main" r:embed="Rb866d6fd68944576"/>
           <a:stretch xmlns:a="http://schemas.openxmlformats.org/drawingml/2006/main"/>
         </p:blipFill>
         <p:spPr>
           <a:xfrm xmlns:a="http://schemas.openxmlformats.org/drawingml/2006/main">
-            <a:off x="7982069" y="895350"/>
-            <a:ext cx="2542936" cy="5448300"/>
+            <a:off x="733696" y="3028950"/>
+            <a:ext cx="4933409" cy="3305175"/>
           </a:xfrm>
           <a:prstGeom xmlns:a="http://schemas.openxmlformats.org/drawingml/2006/main" prst="rect">
             <a:avLst/>
           </a:prstGeom>
         </p:spPr>
       </p:pic>
+      <p:pic>
+        <p:nvPicPr>
+          <p:cNvPr id="19" name=""/>
+          <p:cNvPicPr>
+            <a:picLocks xmlns:a="http://schemas.openxmlformats.org/drawingml/2006/main" noChangeAspect="1"/>
+          </p:cNvPicPr>
+          <p:nvPr/>
+        </p:nvPicPr>
+        <p:blipFill>
+          <a:blip xmlns:r="http://schemas.openxmlformats.org/officeDocument/2006/relationships" xmlns:a="http://schemas.openxmlformats.org/drawingml/2006/main" r:embed="R993bfc2651d44369"/>
+          <a:stretch xmlns:a="http://schemas.openxmlformats.org/drawingml/2006/main"/>
+        </p:blipFill>
+        <p:spPr>
+          <a:xfrm xmlns:a="http://schemas.openxmlformats.org/drawingml/2006/main">
+            <a:off x="6667649" y="3028950"/>
+            <a:ext cx="4647902" cy="3305175"/>
+          </a:xfrm>
+          <a:prstGeom xmlns:a="http://schemas.openxmlformats.org/drawingml/2006/main" prst="rect">
+            <a:avLst/>
+          </a:prstGeom>
+        </p:spPr>
+      </p:pic>
+      <p:sp>
+        <p:nvSpPr>
+          <p:cNvPr id="10" name="stage">
+            <a:extLst xmlns:a="http://schemas.openxmlformats.org/drawingml/2006/main">
+              <a:ext uri="{FF2B5EF4-FFF2-40B4-BE49-F238E27FC236}">
+                <a16:creationId xmlns:a16="http://schemas.microsoft.com/office/drawing/2014/main" id="{548B68BD-5529-4C3B-8245-5C5FB0E5905A}"/>
+              </a:ext>
+            </a:extLst>
+          </p:cNvPr>
+          <p:cNvSpPr>
+            <a:spLocks xmlns:a="http://schemas.openxmlformats.org/drawingml/2006/main" noGrp="1"/>
+          </p:cNvSpPr>
+          <p:nvPr/>
+        </p:nvSpPr>
+        <p:spPr>
+          <a:xfrm xmlns:a="http://schemas.openxmlformats.org/drawingml/2006/main">
+            <a:off x="609600" y="6467475"/>
+            <a:ext cx="10572750" cy="257175"/>
+          </a:xfrm>
+          <a:prstGeom xmlns:a="http://schemas.openxmlformats.org/drawingml/2006/main" prst="rect">
+            <a:avLst/>
+          </a:prstGeom>
+          <a:noFill xmlns:a="http://schemas.openxmlformats.org/drawingml/2006/main"/>
+          <a:ln xmlns:a="http://schemas.openxmlformats.org/drawingml/2006/main" w="0">
+            <a:noFill/>
+          </a:ln>
+        </p:spPr>
+        <p:txBody>
+          <a:bodyPr xmlns:a="http://schemas.openxmlformats.org/drawingml/2006/main" wrap="square" lIns="0" tIns="0" rIns="0" bIns="0" anchor="t">
+            <a:noAutofit/>
+          </a:bodyPr>
+          <a:lstStyle xmlns:a="http://schemas.openxmlformats.org/drawingml/2006/main"/>
+          <a:p xmlns:a="http://schemas.openxmlformats.org/drawingml/2006/main">
+            <a:pPr>
+              <a:lnSpc>
+                <a:spcPct val="110000"/>
+              </a:lnSpc>
+              <a:buNone/>
+              <a:defRPr sz="1275" b="0">
+                <a:solidFill>
+                  <a:srgbClr val="58645D"/>
+                </a:solidFill>
+                <a:latin typeface="Helvetica Neue"/>
+                <a:ea typeface="Helvetica Neue"/>
+                <a:cs typeface="Helvetica Neue"/>
+              </a:defRPr>
+            </a:pPr>
+            <a:r>
+              <a:rPr sz="1275" b="0">
+                <a:solidFill>
+                  <a:srgbClr val="58645D"/>
+                </a:solidFill>
+                <a:latin typeface="Helvetica Neue"/>
+                <a:ea typeface="Helvetica Neue"/>
+                <a:cs typeface="Helvetica Neue"/>
+              </a:rPr>
+              <a:t>Original interface and revised design · UX Designer &amp; Researcher, 2025–2026 · user impact unmeasured</a:t>
+            </a:r>
+          </a:p>
+        </p:txBody>
+      </p:sp>
     </p:spTree>
     <p:extLst>
       <p:ext uri="{BB962C8B-B14F-4D97-AF65-F5344CB8AC3E}">
-        <p14:creationId xmlns:p14="http://schemas.microsoft.com/office/powerpoint/2010/main" val="122957110"/>
+        <p14:creationId xmlns:p14="http://schemas.microsoft.com/office/powerpoint/2010/main" val="1634921769"/>
       </p:ext>
     </p:extLst>
   </p:cSld>
@@ -3126,7 +3125,7 @@
           <p:cNvPr id="9" name="slide-number">
             <a:extLst xmlns:a="http://schemas.openxmlformats.org/drawingml/2006/main">
               <a:ext uri="{FF2B5EF4-FFF2-40B4-BE49-F238E27FC236}">
-                <a16:creationId xmlns:a16="http://schemas.microsoft.com/office/drawing/2014/main" id="{1236A8A2-5FD9-47BC-9E19-3905AE09D3A3}"/>
+                <a16:creationId xmlns:a16="http://schemas.microsoft.com/office/drawing/2014/main" id="{63E5901C-45C7-4489-9BA9-311B936CB323}"/>
               </a:ext>
             </a:extLst>
           </p:cNvPr>
@@ -3187,7 +3186,7 @@
           <p:cNvPr id="2" name="section-label">
             <a:extLst xmlns:a="http://schemas.openxmlformats.org/drawingml/2006/main">
               <a:ext uri="{FF2B5EF4-FFF2-40B4-BE49-F238E27FC236}">
-                <a16:creationId xmlns:a16="http://schemas.microsoft.com/office/drawing/2014/main" id="{08D28B54-86F1-4FDD-9684-DCA0024BCAB1}"/>
+                <a16:creationId xmlns:a16="http://schemas.microsoft.com/office/drawing/2014/main" id="{295D178F-DAAC-4396-B030-6D0F8060B984}"/>
               </a:ext>
             </a:extLst>
           </p:cNvPr>
@@ -3248,7 +3247,7 @@
           <p:cNvPr id="3" name="headline">
             <a:extLst xmlns:a="http://schemas.openxmlformats.org/drawingml/2006/main">
               <a:ext uri="{FF2B5EF4-FFF2-40B4-BE49-F238E27FC236}">
-                <a16:creationId xmlns:a16="http://schemas.microsoft.com/office/drawing/2014/main" id="{7CF3A88A-C1A7-4AA4-AB38-E6DCA3AE351D}"/>
+                <a16:creationId xmlns:a16="http://schemas.microsoft.com/office/drawing/2014/main" id="{170025BE-CCAE-4B3B-A614-4FA7EC1441A3}"/>
               </a:ext>
             </a:extLst>
           </p:cNvPr>
@@ -3336,7 +3335,7 @@
           <p:cNvPr id="4" name="waiting-decision">
             <a:extLst xmlns:a="http://schemas.openxmlformats.org/drawingml/2006/main">
               <a:ext uri="{FF2B5EF4-FFF2-40B4-BE49-F238E27FC236}">
-                <a16:creationId xmlns:a16="http://schemas.microsoft.com/office/drawing/2014/main" id="{5C8DF091-82B2-41F3-8BDD-337715CA66BD}"/>
+                <a16:creationId xmlns:a16="http://schemas.microsoft.com/office/drawing/2014/main" id="{5C412603-137B-4291-9E11-EEE691A742A6}"/>
               </a:ext>
             </a:extLst>
           </p:cNvPr>
@@ -3397,7 +3396,7 @@
           <p:cNvPr id="5" name="waiting-constraint">
             <a:extLst xmlns:a="http://schemas.openxmlformats.org/drawingml/2006/main">
               <a:ext uri="{FF2B5EF4-FFF2-40B4-BE49-F238E27FC236}">
-                <a16:creationId xmlns:a16="http://schemas.microsoft.com/office/drawing/2014/main" id="{2726AC3B-9CCE-471F-B524-7EFCE813ED15}"/>
+                <a16:creationId xmlns:a16="http://schemas.microsoft.com/office/drawing/2014/main" id="{57F5B170-8E8E-4132-95D2-A2C24E59B413}"/>
               </a:ext>
             </a:extLst>
           </p:cNvPr>
@@ -3462,7 +3461,7 @@
           <p:nvPr/>
         </p:nvPicPr>
         <p:blipFill>
-          <a:blip xmlns:r="http://schemas.openxmlformats.org/officeDocument/2006/relationships" xmlns:a="http://schemas.openxmlformats.org/drawingml/2006/main" r:embed="Rfefdc1112d4e4521"/>
+          <a:blip xmlns:r="http://schemas.openxmlformats.org/officeDocument/2006/relationships" xmlns:a="http://schemas.openxmlformats.org/drawingml/2006/main" r:embed="R1d3d1ff870a04e19"/>
           <a:stretch xmlns:a="http://schemas.openxmlformats.org/drawingml/2006/main"/>
         </p:blipFill>
         <p:spPr>
@@ -3480,7 +3479,7 @@
           <p:cNvPr id="7" name="detail-caption">
             <a:extLst xmlns:a="http://schemas.openxmlformats.org/drawingml/2006/main">
               <a:ext uri="{FF2B5EF4-FFF2-40B4-BE49-F238E27FC236}">
-                <a16:creationId xmlns:a16="http://schemas.microsoft.com/office/drawing/2014/main" id="{1453D508-F74E-4661-9647-0043F53EE4E5}"/>
+                <a16:creationId xmlns:a16="http://schemas.microsoft.com/office/drawing/2014/main" id="{102ED4AF-0892-43AE-8A86-ED699CA32202}"/>
               </a:ext>
             </a:extLst>
           </p:cNvPr>
@@ -3545,7 +3544,7 @@
           <p:nvPr/>
         </p:nvPicPr>
         <p:blipFill>
-          <a:blip xmlns:r="http://schemas.openxmlformats.org/officeDocument/2006/relationships" xmlns:a="http://schemas.openxmlformats.org/drawingml/2006/main" r:embed="R018ac03db71e42fb"/>
+          <a:blip xmlns:r="http://schemas.openxmlformats.org/officeDocument/2006/relationships" xmlns:a="http://schemas.openxmlformats.org/drawingml/2006/main" r:embed="R2dbcead31a7b4e65"/>
           <a:stretch xmlns:a="http://schemas.openxmlformats.org/drawingml/2006/main"/>
         </p:blipFill>
         <p:spPr>
@@ -3561,7 +3560,7 @@
     </p:spTree>
     <p:extLst>
       <p:ext uri="{BB962C8B-B14F-4D97-AF65-F5344CB8AC3E}">
-        <p14:creationId xmlns:p14="http://schemas.microsoft.com/office/powerpoint/2010/main" val="1424311719"/>
+        <p14:creationId xmlns:p14="http://schemas.microsoft.com/office/powerpoint/2010/main" val="640413756"/>
       </p:ext>
     </p:extLst>
   </p:cSld>
@@ -3592,7 +3591,7 @@
           <p:cNvPr id="10" name="slide-number">
             <a:extLst xmlns:a="http://schemas.openxmlformats.org/drawingml/2006/main">
               <a:ext uri="{FF2B5EF4-FFF2-40B4-BE49-F238E27FC236}">
-                <a16:creationId xmlns:a16="http://schemas.microsoft.com/office/drawing/2014/main" id="{9ED8A18E-B1B5-4A51-B27B-76E585B5C355}"/>
+                <a16:creationId xmlns:a16="http://schemas.microsoft.com/office/drawing/2014/main" id="{E2503DA0-E362-4A51-8AA2-F95C58E62938}"/>
               </a:ext>
             </a:extLst>
           </p:cNvPr>
@@ -3653,7 +3652,7 @@
           <p:cNvPr id="2" name="section-label">
             <a:extLst xmlns:a="http://schemas.openxmlformats.org/drawingml/2006/main">
               <a:ext uri="{FF2B5EF4-FFF2-40B4-BE49-F238E27FC236}">
-                <a16:creationId xmlns:a16="http://schemas.microsoft.com/office/drawing/2014/main" id="{CAF097C2-CF62-4FDF-A614-4A9D539A1004}"/>
+                <a16:creationId xmlns:a16="http://schemas.microsoft.com/office/drawing/2014/main" id="{2AC76F82-D862-4F06-8349-8F3901FEE1E9}"/>
               </a:ext>
             </a:extLst>
           </p:cNvPr>
@@ -3714,7 +3713,7 @@
           <p:cNvPr id="3" name="headline">
             <a:extLst xmlns:a="http://schemas.openxmlformats.org/drawingml/2006/main">
               <a:ext uri="{FF2B5EF4-FFF2-40B4-BE49-F238E27FC236}">
-                <a16:creationId xmlns:a16="http://schemas.microsoft.com/office/drawing/2014/main" id="{2C5752DD-3752-4106-B06E-0605583D20CB}"/>
+                <a16:creationId xmlns:a16="http://schemas.microsoft.com/office/drawing/2014/main" id="{3DE4F008-4E04-4A9E-A03E-96816EA70ACC}"/>
               </a:ext>
             </a:extLst>
           </p:cNvPr>
@@ -3802,7 +3801,7 @@
           <p:cNvPr id="4" name="recovery-decision">
             <a:extLst xmlns:a="http://schemas.openxmlformats.org/drawingml/2006/main">
               <a:ext uri="{FF2B5EF4-FFF2-40B4-BE49-F238E27FC236}">
-                <a16:creationId xmlns:a16="http://schemas.microsoft.com/office/drawing/2014/main" id="{F833A5E3-747E-4211-ABEA-A70EABC3F248}"/>
+                <a16:creationId xmlns:a16="http://schemas.microsoft.com/office/drawing/2014/main" id="{714EE02C-48E6-40AE-AD27-980E80AFE1A7}"/>
               </a:ext>
             </a:extLst>
           </p:cNvPr>
@@ -3863,7 +3862,7 @@
           <p:cNvPr id="5" name="recovery-outcome">
             <a:extLst xmlns:a="http://schemas.openxmlformats.org/drawingml/2006/main">
               <a:ext uri="{FF2B5EF4-FFF2-40B4-BE49-F238E27FC236}">
-                <a16:creationId xmlns:a16="http://schemas.microsoft.com/office/drawing/2014/main" id="{9BF1DBAE-5109-4B35-9E97-DDAE66987BEB}"/>
+                <a16:creationId xmlns:a16="http://schemas.microsoft.com/office/drawing/2014/main" id="{0236DB1D-F541-4DFF-A236-538E2119D8A6}"/>
               </a:ext>
             </a:extLst>
           </p:cNvPr>
@@ -3874,8 +3873,8 @@
         </p:nvSpPr>
         <p:spPr>
           <a:xfrm xmlns:a="http://schemas.openxmlformats.org/drawingml/2006/main">
-            <a:off x="609600" y="4772025"/>
-            <a:ext cx="4352925" cy="1133475"/>
+            <a:off x="609600" y="4695825"/>
+            <a:ext cx="4352925" cy="1314450"/>
           </a:xfrm>
           <a:prstGeom xmlns:a="http://schemas.openxmlformats.org/drawingml/2006/main" prst="rect">
             <a:avLst/>
@@ -3896,7 +3895,7 @@
                 <a:spcPct val="110000"/>
               </a:lnSpc>
               <a:buNone/>
-              <a:defRPr sz="1800" b="0">
+              <a:defRPr sz="1725" b="0">
                 <a:solidFill>
                   <a:srgbClr val="58645D"/>
                 </a:solidFill>
@@ -3906,7 +3905,7 @@
               </a:defRPr>
             </a:pPr>
             <a:r>
-              <a:rPr sz="1800" b="0">
+              <a:rPr sz="1725" b="0">
                 <a:solidFill>
                   <a:srgbClr val="58645D"/>
                 </a:solidFill>
@@ -3914,7 +3913,7 @@
                 <a:ea typeface="Helvetica Neue"/>
                 <a:cs typeface="Helvetica Neue"/>
               </a:rPr>
-              <a:t>I assembled the flows and their next actions into an annotated handoff for engineering.</a:t>
+              <a:t>An August 2026 engineering reply confirmed implementation of the approved error states. The exact pictured variants remain unverified.</a:t>
             </a:r>
           </a:p>
         </p:txBody>
@@ -3924,7 +3923,7 @@
           <p:cNvPr id="6" name="incomplete-label">
             <a:extLst xmlns:a="http://schemas.openxmlformats.org/drawingml/2006/main">
               <a:ext uri="{FF2B5EF4-FFF2-40B4-BE49-F238E27FC236}">
-                <a16:creationId xmlns:a16="http://schemas.microsoft.com/office/drawing/2014/main" id="{7AB5C320-C73C-44F1-91AE-0A85EDF68552}"/>
+                <a16:creationId xmlns:a16="http://schemas.microsoft.com/office/drawing/2014/main" id="{D7AB9881-EDCA-4FC8-BBB9-CA290744C345}"/>
               </a:ext>
             </a:extLst>
           </p:cNvPr>
@@ -3985,7 +3984,7 @@
           <p:cNvPr id="7" name="offline-label">
             <a:extLst xmlns:a="http://schemas.openxmlformats.org/drawingml/2006/main">
               <a:ext uri="{FF2B5EF4-FFF2-40B4-BE49-F238E27FC236}">
-                <a16:creationId xmlns:a16="http://schemas.microsoft.com/office/drawing/2014/main" id="{115336CE-F44F-45E6-8FF8-9E09E6C9A103}"/>
+                <a16:creationId xmlns:a16="http://schemas.microsoft.com/office/drawing/2014/main" id="{8A425C49-C4DC-4A93-86DD-7DEC894EBE1B}"/>
               </a:ext>
             </a:extLst>
           </p:cNvPr>
@@ -4050,7 +4049,7 @@
           <p:nvPr/>
         </p:nvPicPr>
         <p:blipFill>
-          <a:blip xmlns:r="http://schemas.openxmlformats.org/officeDocument/2006/relationships" xmlns:a="http://schemas.openxmlformats.org/drawingml/2006/main" r:embed="R495b209980f54a99"/>
+          <a:blip xmlns:r="http://schemas.openxmlformats.org/officeDocument/2006/relationships" xmlns:a="http://schemas.openxmlformats.org/drawingml/2006/main" r:embed="R4ff1bdb718c24156"/>
           <a:stretch xmlns:a="http://schemas.openxmlformats.org/drawingml/2006/main"/>
         </p:blipFill>
         <p:spPr>
@@ -4072,7 +4071,7 @@
           <p:nvPr/>
         </p:nvPicPr>
         <p:blipFill>
-          <a:blip xmlns:r="http://schemas.openxmlformats.org/officeDocument/2006/relationships" xmlns:a="http://schemas.openxmlformats.org/drawingml/2006/main" r:embed="R552dfe2e8cc64c0a"/>
+          <a:blip xmlns:r="http://schemas.openxmlformats.org/officeDocument/2006/relationships" xmlns:a="http://schemas.openxmlformats.org/drawingml/2006/main" r:embed="R0bf5710226524da7"/>
           <a:stretch xmlns:a="http://schemas.openxmlformats.org/drawingml/2006/main"/>
         </p:blipFill>
         <p:spPr>
@@ -4088,7 +4087,7 @@
     </p:spTree>
     <p:extLst>
       <p:ext uri="{BB962C8B-B14F-4D97-AF65-F5344CB8AC3E}">
-        <p14:creationId xmlns:p14="http://schemas.microsoft.com/office/powerpoint/2010/main" val="268008632"/>
+        <p14:creationId xmlns:p14="http://schemas.microsoft.com/office/powerpoint/2010/main" val="1154989318"/>
       </p:ext>
     </p:extLst>
   </p:cSld>
@@ -4119,7 +4118,7 @@
           <p:cNvPr id="8" name="slide-number">
             <a:extLst xmlns:a="http://schemas.openxmlformats.org/drawingml/2006/main">
               <a:ext uri="{FF2B5EF4-FFF2-40B4-BE49-F238E27FC236}">
-                <a16:creationId xmlns:a16="http://schemas.microsoft.com/office/drawing/2014/main" id="{5E2CF711-39FB-4113-B23E-600DD14A1757}"/>
+                <a16:creationId xmlns:a16="http://schemas.microsoft.com/office/drawing/2014/main" id="{62DC7942-6DD4-417E-996E-0EEE493E80F1}"/>
               </a:ext>
             </a:extLst>
           </p:cNvPr>
@@ -4180,7 +4179,7 @@
           <p:cNvPr id="2" name="section-label">
             <a:extLst xmlns:a="http://schemas.openxmlformats.org/drawingml/2006/main">
               <a:ext uri="{FF2B5EF4-FFF2-40B4-BE49-F238E27FC236}">
-                <a16:creationId xmlns:a16="http://schemas.microsoft.com/office/drawing/2014/main" id="{AE382314-AA87-4CA7-BC61-9AA94051CF69}"/>
+                <a16:creationId xmlns:a16="http://schemas.microsoft.com/office/drawing/2014/main" id="{CC5C4CCD-7412-4524-A4E8-B122F1EB9847}"/>
               </a:ext>
             </a:extLst>
           </p:cNvPr>
@@ -4241,7 +4240,7 @@
           <p:cNvPr id="3" name="headline">
             <a:extLst xmlns:a="http://schemas.openxmlformats.org/drawingml/2006/main">
               <a:ext uri="{FF2B5EF4-FFF2-40B4-BE49-F238E27FC236}">
-                <a16:creationId xmlns:a16="http://schemas.microsoft.com/office/drawing/2014/main" id="{1A90B1DA-0D8D-4125-A4B6-B46E64269CCA}"/>
+                <a16:creationId xmlns:a16="http://schemas.microsoft.com/office/drawing/2014/main" id="{75B0691E-46E1-41B8-A59E-2A70543E5F98}"/>
               </a:ext>
             </a:extLst>
           </p:cNvPr>
@@ -4329,7 +4328,7 @@
           <p:cNvPr id="4" name="role">
             <a:extLst xmlns:a="http://schemas.openxmlformats.org/drawingml/2006/main">
               <a:ext uri="{FF2B5EF4-FFF2-40B4-BE49-F238E27FC236}">
-                <a16:creationId xmlns:a16="http://schemas.microsoft.com/office/drawing/2014/main" id="{6B5DBAB9-BB69-429F-B468-25FB499F1EEB}"/>
+                <a16:creationId xmlns:a16="http://schemas.microsoft.com/office/drawing/2014/main" id="{DBA44BB4-5B97-4220-8D92-17E68734A9D6}"/>
               </a:ext>
             </a:extLst>
           </p:cNvPr>
@@ -4390,7 +4389,7 @@
           <p:cNvPr id="5" name="about-decision">
             <a:extLst xmlns:a="http://schemas.openxmlformats.org/drawingml/2006/main">
               <a:ext uri="{FF2B5EF4-FFF2-40B4-BE49-F238E27FC236}">
-                <a16:creationId xmlns:a16="http://schemas.microsoft.com/office/drawing/2014/main" id="{717E70D8-DF9F-4C5D-8260-E18083CAD533}"/>
+                <a16:creationId xmlns:a16="http://schemas.microsoft.com/office/drawing/2014/main" id="{AA2FB6C3-65D6-4C7D-8D33-C9254AC0C5C4}"/>
               </a:ext>
             </a:extLst>
           </p:cNvPr>
@@ -4451,7 +4450,7 @@
           <p:cNvPr id="6" name="about-stage">
             <a:extLst xmlns:a="http://schemas.openxmlformats.org/drawingml/2006/main">
               <a:ext uri="{FF2B5EF4-FFF2-40B4-BE49-F238E27FC236}">
-                <a16:creationId xmlns:a16="http://schemas.microsoft.com/office/drawing/2014/main" id="{E14CCC3B-E662-455B-B009-A8A58FBBE808}"/>
+                <a16:creationId xmlns:a16="http://schemas.microsoft.com/office/drawing/2014/main" id="{5226FFE5-9076-48B3-9148-FB97CF106F79}"/>
               </a:ext>
             </a:extLst>
           </p:cNvPr>
@@ -4543,7 +4542,7 @@
           <p:nvPr/>
         </p:nvPicPr>
         <p:blipFill>
-          <a:blip xmlns:r="http://schemas.openxmlformats.org/officeDocument/2006/relationships" xmlns:a="http://schemas.openxmlformats.org/drawingml/2006/main" r:embed="Rf395df382a34441f"/>
+          <a:blip xmlns:r="http://schemas.openxmlformats.org/officeDocument/2006/relationships" xmlns:a="http://schemas.openxmlformats.org/drawingml/2006/main" r:embed="R865bec4aa85444ba"/>
           <a:stretch xmlns:a="http://schemas.openxmlformats.org/drawingml/2006/main"/>
         </p:blipFill>
         <p:spPr>
@@ -4559,7 +4558,7 @@
     </p:spTree>
     <p:extLst>
       <p:ext uri="{BB962C8B-B14F-4D97-AF65-F5344CB8AC3E}">
-        <p14:creationId xmlns:p14="http://schemas.microsoft.com/office/powerpoint/2010/main" val="915000282"/>
+        <p14:creationId xmlns:p14="http://schemas.microsoft.com/office/powerpoint/2010/main" val="966602934"/>
       </p:ext>
     </p:extLst>
   </p:cSld>
@@ -4590,7 +4589,7 @@
           <p:cNvPr id="8" name="slide-number">
             <a:extLst xmlns:a="http://schemas.openxmlformats.org/drawingml/2006/main">
               <a:ext uri="{FF2B5EF4-FFF2-40B4-BE49-F238E27FC236}">
-                <a16:creationId xmlns:a16="http://schemas.microsoft.com/office/drawing/2014/main" id="{7A29E209-0B2F-4516-8DFF-425850D5B698}"/>
+                <a16:creationId xmlns:a16="http://schemas.microsoft.com/office/drawing/2014/main" id="{2CEBCD03-69BA-4D22-A753-DDEC1E38558F}"/>
               </a:ext>
             </a:extLst>
           </p:cNvPr>
@@ -4651,7 +4650,7 @@
           <p:cNvPr id="2" name="section-label">
             <a:extLst xmlns:a="http://schemas.openxmlformats.org/drawingml/2006/main">
               <a:ext uri="{FF2B5EF4-FFF2-40B4-BE49-F238E27FC236}">
-                <a16:creationId xmlns:a16="http://schemas.microsoft.com/office/drawing/2014/main" id="{1BF4D6CE-E963-44C7-8754-817E72D94020}"/>
+                <a16:creationId xmlns:a16="http://schemas.microsoft.com/office/drawing/2014/main" id="{5E567625-42AA-4906-9A09-B3D44DF04CBD}"/>
               </a:ext>
             </a:extLst>
           </p:cNvPr>
@@ -4712,7 +4711,7 @@
           <p:cNvPr id="3" name="headline">
             <a:extLst xmlns:a="http://schemas.openxmlformats.org/drawingml/2006/main">
               <a:ext uri="{FF2B5EF4-FFF2-40B4-BE49-F238E27FC236}">
-                <a16:creationId xmlns:a16="http://schemas.microsoft.com/office/drawing/2014/main" id="{13A368E2-36CB-4AE3-9801-21443B6548E9}"/>
+                <a16:creationId xmlns:a16="http://schemas.microsoft.com/office/drawing/2014/main" id="{05E336DD-1DD4-46DC-BD21-0856BF4A1F79}"/>
               </a:ext>
             </a:extLst>
           </p:cNvPr>
@@ -4800,7 +4799,7 @@
           <p:cNvPr id="4" name="comparison-decision">
             <a:extLst xmlns:a="http://schemas.openxmlformats.org/drawingml/2006/main">
               <a:ext uri="{FF2B5EF4-FFF2-40B4-BE49-F238E27FC236}">
-                <a16:creationId xmlns:a16="http://schemas.microsoft.com/office/drawing/2014/main" id="{36D8B78A-121D-423C-BDFE-BFB9206B5683}"/>
+                <a16:creationId xmlns:a16="http://schemas.microsoft.com/office/drawing/2014/main" id="{7782A241-0436-4DF9-B8D0-88AB2DDDCBF7}"/>
               </a:ext>
             </a:extLst>
           </p:cNvPr>
@@ -4861,7 +4860,7 @@
           <p:cNvPr id="5" name="comparison-outcome">
             <a:extLst xmlns:a="http://schemas.openxmlformats.org/drawingml/2006/main">
               <a:ext uri="{FF2B5EF4-FFF2-40B4-BE49-F238E27FC236}">
-                <a16:creationId xmlns:a16="http://schemas.microsoft.com/office/drawing/2014/main" id="{7FCEAEFD-E5FE-4FAF-B728-A9BEF89657F3}"/>
+                <a16:creationId xmlns:a16="http://schemas.microsoft.com/office/drawing/2014/main" id="{303FC3DF-992B-4DDD-AA28-D29B4705B1F8}"/>
               </a:ext>
             </a:extLst>
           </p:cNvPr>
@@ -4926,7 +4925,7 @@
           <p:nvPr/>
         </p:nvPicPr>
         <p:blipFill>
-          <a:blip xmlns:r="http://schemas.openxmlformats.org/officeDocument/2006/relationships" xmlns:a="http://schemas.openxmlformats.org/drawingml/2006/main" r:embed="R8400a9e5803f44a8"/>
+          <a:blip xmlns:r="http://schemas.openxmlformats.org/officeDocument/2006/relationships" xmlns:a="http://schemas.openxmlformats.org/drawingml/2006/main" r:embed="R51ce47b009584793"/>
           <a:stretch xmlns:a="http://schemas.openxmlformats.org/drawingml/2006/main"/>
         </p:blipFill>
         <p:spPr>
@@ -4944,7 +4943,7 @@
           <p:cNvPr id="7" name="sample-label">
             <a:extLst xmlns:a="http://schemas.openxmlformats.org/drawingml/2006/main">
               <a:ext uri="{FF2B5EF4-FFF2-40B4-BE49-F238E27FC236}">
-                <a16:creationId xmlns:a16="http://schemas.microsoft.com/office/drawing/2014/main" id="{2A21790F-FDDD-4165-8FD6-239137A4C831}"/>
+                <a16:creationId xmlns:a16="http://schemas.microsoft.com/office/drawing/2014/main" id="{AD30F844-831B-4276-8062-62372EBC6A32}"/>
               </a:ext>
             </a:extLst>
           </p:cNvPr>
@@ -5003,7 +5002,7 @@
     </p:spTree>
     <p:extLst>
       <p:ext uri="{BB962C8B-B14F-4D97-AF65-F5344CB8AC3E}">
-        <p14:creationId xmlns:p14="http://schemas.microsoft.com/office/powerpoint/2010/main" val="1894278546"/>
+        <p14:creationId xmlns:p14="http://schemas.microsoft.com/office/powerpoint/2010/main" val="207338722"/>
       </p:ext>
     </p:extLst>
   </p:cSld>
@@ -5034,7 +5033,7 @@
           <p:cNvPr id="8" name="slide-number">
             <a:extLst xmlns:a="http://schemas.openxmlformats.org/drawingml/2006/main">
               <a:ext uri="{FF2B5EF4-FFF2-40B4-BE49-F238E27FC236}">
-                <a16:creationId xmlns:a16="http://schemas.microsoft.com/office/drawing/2014/main" id="{7E4DA758-CF75-459A-869B-53C55E84BF82}"/>
+                <a16:creationId xmlns:a16="http://schemas.microsoft.com/office/drawing/2014/main" id="{775E6D91-9F71-4186-BEB2-68308CF45FA1}"/>
               </a:ext>
             </a:extLst>
           </p:cNvPr>
@@ -5095,7 +5094,7 @@
           <p:cNvPr id="2" name="section-label">
             <a:extLst xmlns:a="http://schemas.openxmlformats.org/drawingml/2006/main">
               <a:ext uri="{FF2B5EF4-FFF2-40B4-BE49-F238E27FC236}">
-                <a16:creationId xmlns:a16="http://schemas.microsoft.com/office/drawing/2014/main" id="{60FBD816-F314-4599-BCBC-F728BF446F5F}"/>
+                <a16:creationId xmlns:a16="http://schemas.microsoft.com/office/drawing/2014/main" id="{F0F39D1A-88DF-4BBC-A700-801C1D4BA9DB}"/>
               </a:ext>
             </a:extLst>
           </p:cNvPr>
@@ -5156,7 +5155,7 @@
           <p:cNvPr id="3" name="headline">
             <a:extLst xmlns:a="http://schemas.openxmlformats.org/drawingml/2006/main">
               <a:ext uri="{FF2B5EF4-FFF2-40B4-BE49-F238E27FC236}">
-                <a16:creationId xmlns:a16="http://schemas.microsoft.com/office/drawing/2014/main" id="{FFDBC860-B2EC-4180-888B-09C0F2BD9038}"/>
+                <a16:creationId xmlns:a16="http://schemas.microsoft.com/office/drawing/2014/main" id="{3B56CEA9-5419-4A47-97AD-9E041FB2A4E2}"/>
               </a:ext>
             </a:extLst>
           </p:cNvPr>
@@ -5244,7 +5243,7 @@
           <p:cNvPr id="4" name="oak-observation">
             <a:extLst xmlns:a="http://schemas.openxmlformats.org/drawingml/2006/main">
               <a:ext uri="{FF2B5EF4-FFF2-40B4-BE49-F238E27FC236}">
-                <a16:creationId xmlns:a16="http://schemas.microsoft.com/office/drawing/2014/main" id="{6B3D66E1-5B1E-493D-831A-491D23B037CB}"/>
+                <a16:creationId xmlns:a16="http://schemas.microsoft.com/office/drawing/2014/main" id="{ED931B58-FA09-4E8B-B0C6-4DD6EF8E059B}"/>
               </a:ext>
             </a:extLst>
           </p:cNvPr>
@@ -5305,7 +5304,7 @@
           <p:cNvPr id="5" name="oak-rationale">
             <a:extLst xmlns:a="http://schemas.openxmlformats.org/drawingml/2006/main">
               <a:ext uri="{FF2B5EF4-FFF2-40B4-BE49-F238E27FC236}">
-                <a16:creationId xmlns:a16="http://schemas.microsoft.com/office/drawing/2014/main" id="{33614EEE-D16D-4FF3-A662-4B5DAA76DD59}"/>
+                <a16:creationId xmlns:a16="http://schemas.microsoft.com/office/drawing/2014/main" id="{C72E56B1-FC2F-4999-BAF9-F5A353950FB0}"/>
               </a:ext>
             </a:extLst>
           </p:cNvPr>
@@ -5366,7 +5365,7 @@
           <p:cNvPr id="6" name="oak-stage">
             <a:extLst xmlns:a="http://schemas.openxmlformats.org/drawingml/2006/main">
               <a:ext uri="{FF2B5EF4-FFF2-40B4-BE49-F238E27FC236}">
-                <a16:creationId xmlns:a16="http://schemas.microsoft.com/office/drawing/2014/main" id="{D11CD25D-10A8-44F9-8E66-32E49BFD8490}"/>
+                <a16:creationId xmlns:a16="http://schemas.microsoft.com/office/drawing/2014/main" id="{A04B6531-C174-475A-8F4A-002EF231E117}"/>
               </a:ext>
             </a:extLst>
           </p:cNvPr>
@@ -5431,7 +5430,7 @@
           <p:nvPr/>
         </p:nvPicPr>
         <p:blipFill>
-          <a:blip xmlns:r="http://schemas.openxmlformats.org/officeDocument/2006/relationships" xmlns:a="http://schemas.openxmlformats.org/drawingml/2006/main" r:embed="R3f427a66e89b46c8"/>
+          <a:blip xmlns:r="http://schemas.openxmlformats.org/officeDocument/2006/relationships" xmlns:a="http://schemas.openxmlformats.org/drawingml/2006/main" r:embed="R4779103d0a2a4be1"/>
           <a:stretch xmlns:a="http://schemas.openxmlformats.org/drawingml/2006/main"/>
         </p:blipFill>
         <p:spPr>
@@ -5447,7 +5446,7 @@
     </p:spTree>
     <p:extLst>
       <p:ext uri="{BB962C8B-B14F-4D97-AF65-F5344CB8AC3E}">
-        <p14:creationId xmlns:p14="http://schemas.microsoft.com/office/powerpoint/2010/main" val="810396139"/>
+        <p14:creationId xmlns:p14="http://schemas.microsoft.com/office/powerpoint/2010/main" val="993783581"/>
       </p:ext>
     </p:extLst>
   </p:cSld>
@@ -5478,7 +5477,7 @@
           <p:cNvPr id="13" name="slide-number">
             <a:extLst xmlns:a="http://schemas.openxmlformats.org/drawingml/2006/main">
               <a:ext uri="{FF2B5EF4-FFF2-40B4-BE49-F238E27FC236}">
-                <a16:creationId xmlns:a16="http://schemas.microsoft.com/office/drawing/2014/main" id="{8D193A52-7461-49EF-A2AD-F919D665A682}"/>
+                <a16:creationId xmlns:a16="http://schemas.microsoft.com/office/drawing/2014/main" id="{46F8FFB7-4167-4492-A44A-8F81B191D013}"/>
               </a:ext>
             </a:extLst>
           </p:cNvPr>
@@ -5539,7 +5538,7 @@
           <p:cNvPr id="2" name="section-label">
             <a:extLst xmlns:a="http://schemas.openxmlformats.org/drawingml/2006/main">
               <a:ext uri="{FF2B5EF4-FFF2-40B4-BE49-F238E27FC236}">
-                <a16:creationId xmlns:a16="http://schemas.microsoft.com/office/drawing/2014/main" id="{1317D2B6-2D0F-42EA-8033-FA4112BA6079}"/>
+                <a16:creationId xmlns:a16="http://schemas.microsoft.com/office/drawing/2014/main" id="{CCE1B6A1-A170-4512-8330-C27B6BEFAAE7}"/>
               </a:ext>
             </a:extLst>
           </p:cNvPr>
@@ -5590,7 +5589,7 @@
                 <a:ea typeface="Helvetica Neue"/>
                 <a:cs typeface="Helvetica Neue"/>
               </a:rPr>
-              <a:t>OAK AI   /   LOGIN FEEDBACK</a:t>
+              <a:t>OAK AI   /   ERROR RECOVERY RECOMMENDATION</a:t>
             </a:r>
           </a:p>
         </p:txBody>
@@ -5600,7 +5599,7 @@
           <p:cNvPr id="3" name="headline">
             <a:extLst xmlns:a="http://schemas.openxmlformats.org/drawingml/2006/main">
               <a:ext uri="{FF2B5EF4-FFF2-40B4-BE49-F238E27FC236}">
-                <a16:creationId xmlns:a16="http://schemas.microsoft.com/office/drawing/2014/main" id="{A3EC6DD5-D8F8-44E9-A662-4940FA2EC990}"/>
+                <a16:creationId xmlns:a16="http://schemas.microsoft.com/office/drawing/2014/main" id="{734ED87D-FB2A-4722-A717-502554CA31B4}"/>
               </a:ext>
             </a:extLst>
           </p:cNvPr>
@@ -5611,8 +5610,8 @@
         </p:nvSpPr>
         <p:spPr>
           <a:xfrm xmlns:a="http://schemas.openxmlformats.org/drawingml/2006/main">
-            <a:off x="609600" y="1143000"/>
-            <a:ext cx="4210050" cy="1409700"/>
+            <a:off x="609600" y="1104900"/>
+            <a:ext cx="10953750" cy="800100"/>
           </a:xfrm>
           <a:prstGeom xmlns:a="http://schemas.openxmlformats.org/drawingml/2006/main" prst="rect">
             <a:avLst/>
@@ -5633,7 +5632,7 @@
                 <a:spcPct val="110000"/>
               </a:lnSpc>
               <a:buNone/>
-              <a:defRPr sz="3450" b="1">
+              <a:defRPr sz="3525" b="1">
                 <a:solidFill>
                   <a:srgbClr val="192B25"/>
                 </a:solidFill>
@@ -5643,7 +5642,7 @@
               </a:defRPr>
             </a:pPr>
             <a:r>
-              <a:rPr sz="3450" b="1">
+              <a:rPr sz="3525" b="1">
                 <a:solidFill>
                   <a:srgbClr val="192B25"/>
                 </a:solidFill>
@@ -5651,44 +5650,17 @@
                 <a:ea typeface="Helvetica Neue"/>
                 <a:cs typeface="Helvetica Neue"/>
               </a:rPr>
-              <a:t>Error feedback</a:t>
-            </a:r>
-          </a:p>
-          <a:p xmlns:a="http://schemas.openxmlformats.org/drawingml/2006/main">
-            <a:pPr>
-              <a:lnSpc>
-                <a:spcPct val="110000"/>
-              </a:lnSpc>
-              <a:buNone/>
-              <a:defRPr sz="3450" b="1">
-                <a:solidFill>
-                  <a:srgbClr val="192B25"/>
-                </a:solidFill>
-                <a:latin typeface="Helvetica Neue"/>
-                <a:ea typeface="Helvetica Neue"/>
-                <a:cs typeface="Helvetica Neue"/>
-              </a:defRPr>
-            </a:pPr>
-            <a:r>
-              <a:rPr sz="3450" b="1">
-                <a:solidFill>
-                  <a:srgbClr val="192B25"/>
-                </a:solidFill>
-                <a:latin typeface="Helvetica Neue"/>
-                <a:ea typeface="Helvetica Neue"/>
-                <a:cs typeface="Helvetica Neue"/>
-              </a:rPr>
-              <a:t>beside the field</a:t>
-            </a:r>
-          </a:p>
-        </p:txBody>
-      </p:sp>
-      <p:sp>
-        <p:nvSpPr>
-          <p:cNvPr id="4" name="oak-error-decision">
+              <a:t>Error feedback beside the field</a:t>
+            </a:r>
+          </a:p>
+        </p:txBody>
+      </p:sp>
+      <p:sp>
+        <p:nvSpPr>
+          <p:cNvPr id="4" name="original-label">
             <a:extLst xmlns:a="http://schemas.openxmlformats.org/drawingml/2006/main">
               <a:ext uri="{FF2B5EF4-FFF2-40B4-BE49-F238E27FC236}">
-                <a16:creationId xmlns:a16="http://schemas.microsoft.com/office/drawing/2014/main" id="{D4327DB8-244E-477C-A5D1-C4DE31360DA4}"/>
+                <a16:creationId xmlns:a16="http://schemas.microsoft.com/office/drawing/2014/main" id="{5A0E59DD-BB65-4278-B20E-CDC20A230857}"/>
               </a:ext>
             </a:extLst>
           </p:cNvPr>
@@ -5699,8 +5671,8 @@
         </p:nvSpPr>
         <p:spPr>
           <a:xfrm xmlns:a="http://schemas.openxmlformats.org/drawingml/2006/main">
-            <a:off x="609600" y="3276600"/>
-            <a:ext cx="3495675" cy="962025"/>
+            <a:off x="609600" y="2162175"/>
+            <a:ext cx="5048250" cy="266700"/>
           </a:xfrm>
           <a:prstGeom xmlns:a="http://schemas.openxmlformats.org/drawingml/2006/main" prst="rect">
             <a:avLst/>
@@ -5721,35 +5693,35 @@
                 <a:spcPct val="110000"/>
               </a:lnSpc>
               <a:buNone/>
-              <a:defRPr sz="2025" b="0">
-                <a:solidFill>
-                  <a:srgbClr val="192B25"/>
-                </a:solidFill>
-                <a:latin typeface="Helvetica Neue"/>
-                <a:ea typeface="Helvetica Neue"/>
-                <a:cs typeface="Helvetica Neue"/>
-              </a:defRPr>
-            </a:pPr>
-            <a:r>
-              <a:rPr sz="2025" b="0">
-                <a:solidFill>
-                  <a:srgbClr val="192B25"/>
-                </a:solidFill>
-                <a:latin typeface="Helvetica Neue"/>
-                <a:ea typeface="Helvetica Neue"/>
-                <a:cs typeface="Helvetica Neue"/>
-              </a:rPr>
-              <a:t>I made the problem field visible where a person could act on it.</a:t>
-            </a:r>
-          </a:p>
-        </p:txBody>
-      </p:sp>
-      <p:sp>
-        <p:nvSpPr>
-          <p:cNvPr id="5" name="oak-error-outcome">
+              <a:defRPr sz="1350" b="1">
+                <a:solidFill>
+                  <a:srgbClr val="244D3C"/>
+                </a:solidFill>
+                <a:latin typeface="Helvetica Neue"/>
+                <a:ea typeface="Helvetica Neue"/>
+                <a:cs typeface="Helvetica Neue"/>
+              </a:defRPr>
+            </a:pPr>
+            <a:r>
+              <a:rPr sz="1350" b="1">
+                <a:solidFill>
+                  <a:srgbClr val="244D3C"/>
+                </a:solidFill>
+                <a:latin typeface="Helvetica Neue"/>
+                <a:ea typeface="Helvetica Neue"/>
+                <a:cs typeface="Helvetica Neue"/>
+              </a:rPr>
+              <a:t>ORIGINAL</a:t>
+            </a:r>
+          </a:p>
+        </p:txBody>
+      </p:sp>
+      <p:sp>
+        <p:nvSpPr>
+          <p:cNvPr id="5" name="proposed-label">
             <a:extLst xmlns:a="http://schemas.openxmlformats.org/drawingml/2006/main">
               <a:ext uri="{FF2B5EF4-FFF2-40B4-BE49-F238E27FC236}">
-                <a16:creationId xmlns:a16="http://schemas.microsoft.com/office/drawing/2014/main" id="{05209FDC-426C-47D1-8592-8A2DC5B28247}"/>
+                <a16:creationId xmlns:a16="http://schemas.microsoft.com/office/drawing/2014/main" id="{A8425475-36CA-4E66-AF4C-C01F13A623A2}"/>
               </a:ext>
             </a:extLst>
           </p:cNvPr>
@@ -5760,8 +5732,8 @@
         </p:nvSpPr>
         <p:spPr>
           <a:xfrm xmlns:a="http://schemas.openxmlformats.org/drawingml/2006/main">
-            <a:off x="609600" y="4848225"/>
-            <a:ext cx="3495675" cy="1162050"/>
+            <a:off x="6515100" y="2162175"/>
+            <a:ext cx="5048250" cy="266700"/>
           </a:xfrm>
           <a:prstGeom xmlns:a="http://schemas.openxmlformats.org/drawingml/2006/main" prst="rect">
             <a:avLst/>
@@ -5782,35 +5754,35 @@
                 <a:spcPct val="110000"/>
               </a:lnSpc>
               <a:buNone/>
-              <a:defRPr sz="1725" b="0">
-                <a:solidFill>
-                  <a:srgbClr val="58645D"/>
-                </a:solidFill>
-                <a:latin typeface="Helvetica Neue"/>
-                <a:ea typeface="Helvetica Neue"/>
-                <a:cs typeface="Helvetica Neue"/>
-              </a:defRPr>
-            </a:pPr>
-            <a:r>
-              <a:rPr sz="1725" b="0">
-                <a:solidFill>
-                  <a:srgbClr val="58645D"/>
-                </a:solidFill>
-                <a:latin typeface="Helvetica Neue"/>
-                <a:ea typeface="Helvetica Neue"/>
-                <a:cs typeface="Helvetica Neue"/>
-              </a:rPr>
-              <a:t>The recommendation gave the team a specific behavior to discuss and prioritize.</a:t>
-            </a:r>
-          </a:p>
-        </p:txBody>
-      </p:sp>
-      <p:sp>
-        <p:nvSpPr>
-          <p:cNvPr id="6" name="before-label">
+              <a:defRPr sz="1350" b="1">
+                <a:solidFill>
+                  <a:srgbClr val="244D3C"/>
+                </a:solidFill>
+                <a:latin typeface="Helvetica Neue"/>
+                <a:ea typeface="Helvetica Neue"/>
+                <a:cs typeface="Helvetica Neue"/>
+              </a:defRPr>
+            </a:pPr>
+            <a:r>
+              <a:rPr sz="1350" b="1">
+                <a:solidFill>
+                  <a:srgbClr val="244D3C"/>
+                </a:solidFill>
+                <a:latin typeface="Helvetica Neue"/>
+                <a:ea typeface="Helvetica Neue"/>
+                <a:cs typeface="Helvetica Neue"/>
+              </a:rPr>
+              <a:t>MY RECOMMENDATION</a:t>
+            </a:r>
+          </a:p>
+        </p:txBody>
+      </p:sp>
+      <p:sp>
+        <p:nvSpPr>
+          <p:cNvPr id="6" name="error-observation">
             <a:extLst xmlns:a="http://schemas.openxmlformats.org/drawingml/2006/main">
               <a:ext uri="{FF2B5EF4-FFF2-40B4-BE49-F238E27FC236}">
-                <a16:creationId xmlns:a16="http://schemas.microsoft.com/office/drawing/2014/main" id="{D7EF5E1B-3EBC-407A-AE7E-AE56FB2B70E0}"/>
+                <a16:creationId xmlns:a16="http://schemas.microsoft.com/office/drawing/2014/main" id="{9B4831F5-7BFE-494E-A696-DF1FD20091D3}"/>
               </a:ext>
             </a:extLst>
           </p:cNvPr>
@@ -5821,8 +5793,8 @@
         </p:nvSpPr>
         <p:spPr>
           <a:xfrm xmlns:a="http://schemas.openxmlformats.org/drawingml/2006/main">
-            <a:off x="4495800" y="1828800"/>
-            <a:ext cx="3314700" cy="257175"/>
+            <a:off x="609600" y="2562225"/>
+            <a:ext cx="5048250" cy="400050"/>
           </a:xfrm>
           <a:prstGeom xmlns:a="http://schemas.openxmlformats.org/drawingml/2006/main" prst="rect">
             <a:avLst/>
@@ -5843,35 +5815,35 @@
                 <a:spcPct val="110000"/>
               </a:lnSpc>
               <a:buNone/>
-              <a:defRPr sz="1350" b="1">
-                <a:solidFill>
-                  <a:srgbClr val="244D3C"/>
-                </a:solidFill>
-                <a:latin typeface="Helvetica Neue"/>
-                <a:ea typeface="Helvetica Neue"/>
-                <a:cs typeface="Helvetica Neue"/>
-              </a:defRPr>
-            </a:pPr>
-            <a:r>
-              <a:rPr sz="1350" b="1">
-                <a:solidFill>
-                  <a:srgbClr val="244D3C"/>
-                </a:solidFill>
-                <a:latin typeface="Helvetica Neue"/>
-                <a:ea typeface="Helvetica Neue"/>
-                <a:cs typeface="Helvetica Neue"/>
-              </a:rPr>
-              <a:t>Original</a:t>
-            </a:r>
-          </a:p>
-        </p:txBody>
-      </p:sp>
-      <p:sp>
-        <p:nvSpPr>
-          <p:cNvPr id="7" name="after-label">
+              <a:defRPr sz="1725" b="0">
+                <a:solidFill>
+                  <a:srgbClr val="192B25"/>
+                </a:solidFill>
+                <a:latin typeface="Helvetica Neue"/>
+                <a:ea typeface="Helvetica Neue"/>
+                <a:cs typeface="Helvetica Neue"/>
+              </a:defRPr>
+            </a:pPr>
+            <a:r>
+              <a:rPr sz="1725" b="0">
+                <a:solidFill>
+                  <a:srgbClr val="192B25"/>
+                </a:solidFill>
+                <a:latin typeface="Helvetica Neue"/>
+                <a:ea typeface="Helvetica Neue"/>
+                <a:cs typeface="Helvetica Neue"/>
+              </a:rPr>
+              <a:t>The error sat away from the login fields.</a:t>
+            </a:r>
+          </a:p>
+        </p:txBody>
+      </p:sp>
+      <p:sp>
+        <p:nvSpPr>
+          <p:cNvPr id="7" name="error-recommendation">
             <a:extLst xmlns:a="http://schemas.openxmlformats.org/drawingml/2006/main">
               <a:ext uri="{FF2B5EF4-FFF2-40B4-BE49-F238E27FC236}">
-                <a16:creationId xmlns:a16="http://schemas.microsoft.com/office/drawing/2014/main" id="{76B5546B-00E7-4D41-B78F-74C991996400}"/>
+                <a16:creationId xmlns:a16="http://schemas.microsoft.com/office/drawing/2014/main" id="{3659ACDA-D2EC-4F28-BF57-AEDF874367CE}"/>
               </a:ext>
             </a:extLst>
           </p:cNvPr>
@@ -5882,8 +5854,8 @@
         </p:nvSpPr>
         <p:spPr>
           <a:xfrm xmlns:a="http://schemas.openxmlformats.org/drawingml/2006/main">
-            <a:off x="8124825" y="1828800"/>
-            <a:ext cx="3314700" cy="257175"/>
+            <a:off x="6515100" y="2562225"/>
+            <a:ext cx="5048250" cy="400050"/>
           </a:xfrm>
           <a:prstGeom xmlns:a="http://schemas.openxmlformats.org/drawingml/2006/main" prst="rect">
             <a:avLst/>
@@ -5904,25 +5876,25 @@
                 <a:spcPct val="110000"/>
               </a:lnSpc>
               <a:buNone/>
-              <a:defRPr sz="1350" b="1">
-                <a:solidFill>
-                  <a:srgbClr val="244D3C"/>
-                </a:solidFill>
-                <a:latin typeface="Helvetica Neue"/>
-                <a:ea typeface="Helvetica Neue"/>
-                <a:cs typeface="Helvetica Neue"/>
-              </a:defRPr>
-            </a:pPr>
-            <a:r>
-              <a:rPr sz="1350" b="1">
-                <a:solidFill>
-                  <a:srgbClr val="244D3C"/>
-                </a:solidFill>
-                <a:latin typeface="Helvetica Neue"/>
-                <a:ea typeface="Helvetica Neue"/>
-                <a:cs typeface="Helvetica Neue"/>
-              </a:rPr>
-              <a:t>Proposed</a:t>
+              <a:defRPr sz="1725" b="0">
+                <a:solidFill>
+                  <a:srgbClr val="192B25"/>
+                </a:solidFill>
+                <a:latin typeface="Helvetica Neue"/>
+                <a:ea typeface="Helvetica Neue"/>
+                <a:cs typeface="Helvetica Neue"/>
+              </a:defRPr>
+            </a:pPr>
+            <a:r>
+              <a:rPr sz="1725" b="0">
+                <a:solidFill>
+                  <a:srgbClr val="192B25"/>
+                </a:solidFill>
+                <a:latin typeface="Helvetica Neue"/>
+                <a:ea typeface="Helvetica Neue"/>
+                <a:cs typeface="Helvetica Neue"/>
+              </a:rPr>
+              <a:t>Place the correction beside the field.</a:t>
             </a:r>
           </a:p>
         </p:txBody>
@@ -5936,13 +5908,13 @@
           <p:nvPr/>
         </p:nvPicPr>
         <p:blipFill>
-          <a:blip xmlns:r="http://schemas.openxmlformats.org/officeDocument/2006/relationships" xmlns:a="http://schemas.openxmlformats.org/drawingml/2006/main" r:embed="R502d920dc6614ce7"/>
+          <a:blip xmlns:r="http://schemas.openxmlformats.org/officeDocument/2006/relationships" xmlns:a="http://schemas.openxmlformats.org/drawingml/2006/main" r:embed="R8bf3b30dd7f34c65"/>
           <a:stretch xmlns:a="http://schemas.openxmlformats.org/drawingml/2006/main"/>
         </p:blipFill>
         <p:spPr>
           <a:xfrm xmlns:a="http://schemas.openxmlformats.org/drawingml/2006/main">
-            <a:off x="4495800" y="2517745"/>
-            <a:ext cx="3314700" cy="2689285"/>
+            <a:off x="1366838" y="3067050"/>
+            <a:ext cx="3533775" cy="2867025"/>
           </a:xfrm>
           <a:prstGeom xmlns:a="http://schemas.openxmlformats.org/drawingml/2006/main" prst="rect">
             <a:avLst/>
@@ -5958,13 +5930,13 @@
           <p:nvPr/>
         </p:nvPicPr>
         <p:blipFill>
-          <a:blip xmlns:r="http://schemas.openxmlformats.org/officeDocument/2006/relationships" xmlns:a="http://schemas.openxmlformats.org/drawingml/2006/main" r:embed="R287fed1b19724a69"/>
+          <a:blip xmlns:r="http://schemas.openxmlformats.org/officeDocument/2006/relationships" xmlns:a="http://schemas.openxmlformats.org/drawingml/2006/main" r:embed="Rc33d956caf3f40bb"/>
           <a:stretch xmlns:a="http://schemas.openxmlformats.org/drawingml/2006/main"/>
         </p:blipFill>
         <p:spPr>
           <a:xfrm xmlns:a="http://schemas.openxmlformats.org/drawingml/2006/main">
-            <a:off x="8124825" y="2674620"/>
-            <a:ext cx="3314700" cy="2375535"/>
+            <a:off x="7038975" y="3067050"/>
+            <a:ext cx="4000500" cy="2867025"/>
           </a:xfrm>
           <a:prstGeom xmlns:a="http://schemas.openxmlformats.org/drawingml/2006/main" prst="rect">
             <a:avLst/>
@@ -5976,7 +5948,7 @@
           <p:cNvPr id="10" name="footer-label">
             <a:extLst xmlns:a="http://schemas.openxmlformats.org/drawingml/2006/main">
               <a:ext uri="{FF2B5EF4-FFF2-40B4-BE49-F238E27FC236}">
-                <a16:creationId xmlns:a16="http://schemas.microsoft.com/office/drawing/2014/main" id="{94440B31-1940-4AD9-B96F-97326B698058}"/>
+                <a16:creationId xmlns:a16="http://schemas.microsoft.com/office/drawing/2014/main" id="{F8635E8F-B4E7-4D24-BF00-4DA19A14C4B2}"/>
               </a:ext>
             </a:extLst>
           </p:cNvPr>
@@ -5987,8 +5959,8 @@
         </p:nvSpPr>
         <p:spPr>
           <a:xfrm xmlns:a="http://schemas.openxmlformats.org/drawingml/2006/main">
-            <a:off x="4495800" y="5514975"/>
-            <a:ext cx="3314700" cy="285750"/>
+            <a:off x="609600" y="6076950"/>
+            <a:ext cx="5048250" cy="228600"/>
           </a:xfrm>
           <a:prstGeom xmlns:a="http://schemas.openxmlformats.org/drawingml/2006/main" prst="rect">
             <a:avLst/>
@@ -6009,7 +5981,7 @@
                 <a:spcPct val="110000"/>
               </a:lnSpc>
               <a:buNone/>
-              <a:defRPr sz="1275" b="0">
+              <a:defRPr sz="1200" b="0">
                 <a:solidFill>
                   <a:srgbClr val="58645D"/>
                 </a:solidFill>
@@ -6019,7 +5991,7 @@
               </a:defRPr>
             </a:pPr>
             <a:r>
-              <a:rPr sz="1275" b="0">
+              <a:rPr sz="1200" b="0">
                 <a:solidFill>
                   <a:srgbClr val="58645D"/>
                 </a:solidFill>
@@ -6027,7 +5999,7 @@
                 <a:ea typeface="Helvetica Neue"/>
                 <a:cs typeface="Helvetica Neue"/>
               </a:rPr>
-              <a:t>Original error at the page footer</a:t>
+              <a:t>Separate page-footer message:</a:t>
             </a:r>
           </a:p>
         </p:txBody>
@@ -6041,13 +6013,13 @@
           <p:nvPr/>
         </p:nvPicPr>
         <p:blipFill>
-          <a:blip xmlns:r="http://schemas.openxmlformats.org/officeDocument/2006/relationships" xmlns:a="http://schemas.openxmlformats.org/drawingml/2006/main" r:embed="Raca85ab144f24be4"/>
+          <a:blip xmlns:r="http://schemas.openxmlformats.org/officeDocument/2006/relationships" xmlns:a="http://schemas.openxmlformats.org/drawingml/2006/main" r:embed="Rffef72d5159443a2"/>
           <a:stretch xmlns:a="http://schemas.openxmlformats.org/drawingml/2006/main"/>
         </p:blipFill>
         <p:spPr>
           <a:xfrm xmlns:a="http://schemas.openxmlformats.org/drawingml/2006/main">
-            <a:off x="4495800" y="5918026"/>
-            <a:ext cx="3314700" cy="317848"/>
+            <a:off x="609600" y="6372225"/>
+            <a:ext cx="3476625" cy="333375"/>
           </a:xfrm>
           <a:prstGeom xmlns:a="http://schemas.openxmlformats.org/drawingml/2006/main" prst="rect">
             <a:avLst/>
@@ -6056,10 +6028,10 @@
       </p:pic>
       <p:sp>
         <p:nvSpPr>
-          <p:cNvPr id="12" name="field-label">
+          <p:cNvPr id="12" name="recommendation-status">
             <a:extLst xmlns:a="http://schemas.openxmlformats.org/drawingml/2006/main">
               <a:ext uri="{FF2B5EF4-FFF2-40B4-BE49-F238E27FC236}">
-                <a16:creationId xmlns:a16="http://schemas.microsoft.com/office/drawing/2014/main" id="{52C6581C-9673-41DF-B3E5-34B19C7F69E2}"/>
+                <a16:creationId xmlns:a16="http://schemas.microsoft.com/office/drawing/2014/main" id="{4AC632A4-8197-4D73-8C92-D9260CDC9ABB}"/>
               </a:ext>
             </a:extLst>
           </p:cNvPr>
@@ -6070,8 +6042,8 @@
         </p:nvSpPr>
         <p:spPr>
           <a:xfrm xmlns:a="http://schemas.openxmlformats.org/drawingml/2006/main">
-            <a:off x="8124825" y="5514975"/>
-            <a:ext cx="3314700" cy="561975"/>
+            <a:off x="6515100" y="6115050"/>
+            <a:ext cx="4686300" cy="542925"/>
           </a:xfrm>
           <a:prstGeom xmlns:a="http://schemas.openxmlformats.org/drawingml/2006/main" prst="rect">
             <a:avLst/>
@@ -6110,7 +6082,34 @@
                 <a:ea typeface="Helvetica Neue"/>
                 <a:cs typeface="Helvetica Neue"/>
               </a:rPr>
-              <a:t>Proposed feedback beside the field</a:t>
+              <a:t>Original recommendation artifact.</a:t>
+            </a:r>
+          </a:p>
+          <a:p xmlns:a="http://schemas.openxmlformats.org/drawingml/2006/main">
+            <a:pPr>
+              <a:lnSpc>
+                <a:spcPct val="110000"/>
+              </a:lnSpc>
+              <a:buNone/>
+              <a:defRPr sz="1275" b="0">
+                <a:solidFill>
+                  <a:srgbClr val="58645D"/>
+                </a:solidFill>
+                <a:latin typeface="Helvetica Neue"/>
+                <a:ea typeface="Helvetica Neue"/>
+                <a:cs typeface="Helvetica Neue"/>
+              </a:defRPr>
+            </a:pPr>
+            <a:r>
+              <a:rPr sz="1275" b="0">
+                <a:solidFill>
+                  <a:srgbClr val="58645D"/>
+                </a:solidFill>
+                <a:latin typeface="Helvetica Neue"/>
+                <a:ea typeface="Helvetica Neue"/>
+                <a:cs typeface="Helvetica Neue"/>
+              </a:rPr>
+              <a:t>Exact shipped variant and usability impact unverified.</a:t>
             </a:r>
           </a:p>
         </p:txBody>
@@ -6118,7 +6117,7 @@
     </p:spTree>
     <p:extLst>
       <p:ext uri="{BB962C8B-B14F-4D97-AF65-F5344CB8AC3E}">
-        <p14:creationId xmlns:p14="http://schemas.microsoft.com/office/powerpoint/2010/main" val="433216434"/>
+        <p14:creationId xmlns:p14="http://schemas.microsoft.com/office/powerpoint/2010/main" val="1755468734"/>
       </p:ext>
     </p:extLst>
   </p:cSld>
@@ -6149,7 +6148,7 @@
           <p:cNvPr id="9" name="slide-number">
             <a:extLst xmlns:a="http://schemas.openxmlformats.org/drawingml/2006/main">
               <a:ext uri="{FF2B5EF4-FFF2-40B4-BE49-F238E27FC236}">
-                <a16:creationId xmlns:a16="http://schemas.microsoft.com/office/drawing/2014/main" id="{3F999CA6-BA9B-4C29-B9C3-9EA95C2299A0}"/>
+                <a16:creationId xmlns:a16="http://schemas.microsoft.com/office/drawing/2014/main" id="{CEE50694-93EC-42D3-89AC-CB4E21C72E50}"/>
               </a:ext>
             </a:extLst>
           </p:cNvPr>
@@ -6210,7 +6209,7 @@
           <p:cNvPr id="2" name="story-image-surface">
             <a:extLst xmlns:a="http://schemas.openxmlformats.org/drawingml/2006/main">
               <a:ext uri="{FF2B5EF4-FFF2-40B4-BE49-F238E27FC236}">
-                <a16:creationId xmlns:a16="http://schemas.microsoft.com/office/drawing/2014/main" id="{37C295FC-37B4-414D-B043-F385475C305D}"/>
+                <a16:creationId xmlns:a16="http://schemas.microsoft.com/office/drawing/2014/main" id="{24FCD8FB-3E96-494C-B896-89A057291B2C}"/>
               </a:ext>
             </a:extLst>
           </p:cNvPr>
@@ -6244,7 +6243,7 @@
           <p:nvPr/>
         </p:nvPicPr>
         <p:blipFill>
-          <a:blip xmlns:r="http://schemas.openxmlformats.org/officeDocument/2006/relationships" xmlns:a="http://schemas.openxmlformats.org/drawingml/2006/main" r:embed="R6cdbc1db358d44d8"/>
+          <a:blip xmlns:r="http://schemas.openxmlformats.org/officeDocument/2006/relationships" xmlns:a="http://schemas.openxmlformats.org/drawingml/2006/main" r:embed="R6eb0e09ddffa4fa6"/>
           <a:stretch xmlns:a="http://schemas.openxmlformats.org/drawingml/2006/main"/>
         </p:blipFill>
         <p:spPr>
@@ -6262,7 +6261,7 @@
           <p:cNvPr id="4" name="section-label">
             <a:extLst xmlns:a="http://schemas.openxmlformats.org/drawingml/2006/main">
               <a:ext uri="{FF2B5EF4-FFF2-40B4-BE49-F238E27FC236}">
-                <a16:creationId xmlns:a16="http://schemas.microsoft.com/office/drawing/2014/main" id="{BA4FA6FD-61E6-4FFB-B8C0-65202C8141BD}"/>
+                <a16:creationId xmlns:a16="http://schemas.microsoft.com/office/drawing/2014/main" id="{7A81CFA2-5C78-4667-A737-30FD9EBEFFB0}"/>
               </a:ext>
             </a:extLst>
           </p:cNvPr>
@@ -6323,7 +6322,7 @@
           <p:cNvPr id="5" name="headline">
             <a:extLst xmlns:a="http://schemas.openxmlformats.org/drawingml/2006/main">
               <a:ext uri="{FF2B5EF4-FFF2-40B4-BE49-F238E27FC236}">
-                <a16:creationId xmlns:a16="http://schemas.microsoft.com/office/drawing/2014/main" id="{2518CD23-CC52-4972-A456-EE8C3A80F789}"/>
+                <a16:creationId xmlns:a16="http://schemas.microsoft.com/office/drawing/2014/main" id="{B09ADDBC-2D33-45D9-A160-B713EF2C84DC}"/>
               </a:ext>
             </a:extLst>
           </p:cNvPr>
@@ -6411,7 +6410,7 @@
           <p:cNvPr id="6" name="story-documentary">
             <a:extLst xmlns:a="http://schemas.openxmlformats.org/drawingml/2006/main">
               <a:ext uri="{FF2B5EF4-FFF2-40B4-BE49-F238E27FC236}">
-                <a16:creationId xmlns:a16="http://schemas.microsoft.com/office/drawing/2014/main" id="{DA10119D-22FB-4ADB-A8C1-F0CC3463A42E}"/>
+                <a16:creationId xmlns:a16="http://schemas.microsoft.com/office/drawing/2014/main" id="{B129A756-3798-4BEA-952F-E2315739255B}"/>
               </a:ext>
             </a:extLst>
           </p:cNvPr>
@@ -6472,7 +6471,7 @@
           <p:cNvPr id="7" name="story-now">
             <a:extLst xmlns:a="http://schemas.openxmlformats.org/drawingml/2006/main">
               <a:ext uri="{FF2B5EF4-FFF2-40B4-BE49-F238E27FC236}">
-                <a16:creationId xmlns:a16="http://schemas.microsoft.com/office/drawing/2014/main" id="{1960B4BF-794C-42F4-9AD9-2014CDAAE56E}"/>
+                <a16:creationId xmlns:a16="http://schemas.microsoft.com/office/drawing/2014/main" id="{0D05F20F-2F5E-4358-9EAA-642247907040}"/>
               </a:ext>
             </a:extLst>
           </p:cNvPr>
@@ -6533,7 +6532,7 @@
           <p:cNvPr id="8" name="story-slide-number">
             <a:extLst xmlns:a="http://schemas.openxmlformats.org/drawingml/2006/main">
               <a:ext uri="{FF2B5EF4-FFF2-40B4-BE49-F238E27FC236}">
-                <a16:creationId xmlns:a16="http://schemas.microsoft.com/office/drawing/2014/main" id="{DD69DACD-7448-4426-A4BB-0DDC7F3936FE}"/>
+                <a16:creationId xmlns:a16="http://schemas.microsoft.com/office/drawing/2014/main" id="{A02BCCA1-2910-4717-8865-C4E59A531E39}"/>
               </a:ext>
             </a:extLst>
           </p:cNvPr>
@@ -6592,7 +6591,7 @@
     </p:spTree>
     <p:extLst>
       <p:ext uri="{BB962C8B-B14F-4D97-AF65-F5344CB8AC3E}">
-        <p14:creationId xmlns:p14="http://schemas.microsoft.com/office/powerpoint/2010/main" val="853056310"/>
+        <p14:creationId xmlns:p14="http://schemas.microsoft.com/office/powerpoint/2010/main" val="1783234674"/>
       </p:ext>
     </p:extLst>
   </p:cSld>
